--- a/LessonAssets/LU1 - Fundamentals of Digital Business Strategy.pptx
+++ b/LessonAssets/LU1 - Fundamentals of Digital Business Strategy.pptx
@@ -5,26 +5,26 @@
     <p:sldMasterId id="2147483648" r:id="rId1"/>
   </p:sldMasterIdLst>
   <p:sldIdLst>
-    <p:sldId id="256" r:id="rId7"/>
-    <p:sldId id="257" r:id="rId8"/>
-    <p:sldId id="258" r:id="rId9"/>
-    <p:sldId id="259" r:id="rId10"/>
-    <p:sldId id="260" r:id="rId11"/>
-    <p:sldId id="261" r:id="rId12"/>
-    <p:sldId id="262" r:id="rId13"/>
-    <p:sldId id="263" r:id="rId14"/>
-    <p:sldId id="264" r:id="rId15"/>
-    <p:sldId id="265" r:id="rId16"/>
-    <p:sldId id="266" r:id="rId17"/>
-    <p:sldId id="267" r:id="rId18"/>
-    <p:sldId id="268" r:id="rId19"/>
-    <p:sldId id="269" r:id="rId20"/>
-    <p:sldId id="270" r:id="rId21"/>
-    <p:sldId id="271" r:id="rId22"/>
-    <p:sldId id="272" r:id="rId23"/>
-    <p:sldId id="273" r:id="rId24"/>
+    <p:sldId id="256" r:id="rId2"/>
+    <p:sldId id="257" r:id="rId3"/>
+    <p:sldId id="258" r:id="rId4"/>
+    <p:sldId id="259" r:id="rId5"/>
+    <p:sldId id="260" r:id="rId6"/>
+    <p:sldId id="261" r:id="rId7"/>
+    <p:sldId id="262" r:id="rId8"/>
+    <p:sldId id="263" r:id="rId9"/>
+    <p:sldId id="264" r:id="rId10"/>
+    <p:sldId id="265" r:id="rId11"/>
+    <p:sldId id="266" r:id="rId12"/>
+    <p:sldId id="267" r:id="rId13"/>
+    <p:sldId id="268" r:id="rId14"/>
+    <p:sldId id="269" r:id="rId15"/>
+    <p:sldId id="270" r:id="rId16"/>
+    <p:sldId id="271" r:id="rId17"/>
+    <p:sldId id="272" r:id="rId18"/>
+    <p:sldId id="273" r:id="rId19"/>
   </p:sldIdLst>
-  <p:sldSz cx="12192000" cy="6858000" type="screen4x3"/>
+  <p:sldSz cx="12192000" cy="6858000"/>
   <p:notesSz cx="6858000" cy="9144000"/>
   <p:defaultTextStyle>
     <a:defPPr>
@@ -121,7 +121,52 @@
       </a:defRPr>
     </a:lvl9pPr>
   </p:defaultTextStyle>
+  <p:extLst>
+    <p:ext uri="{EFAFB233-063F-42B5-8137-9DF3F51BA10A}">
+      <p15:sldGuideLst xmlns:p15="http://schemas.microsoft.com/office/powerpoint/2012/main">
+        <p15:guide id="1" orient="horz" pos="2160">
+          <p15:clr>
+            <a:srgbClr val="A4A3A4"/>
+          </p15:clr>
+        </p15:guide>
+        <p15:guide id="2" pos="2880">
+          <p15:clr>
+            <a:srgbClr val="A4A3A4"/>
+          </p15:clr>
+        </p15:guide>
+      </p15:sldGuideLst>
+    </p:ext>
+  </p:extLst>
 </p:presentation>
+</file>
+
+<file path=ppt/changesInfos/changesInfo1.xml><?xml version="1.0" encoding="utf-8"?>
+<pc:chgInfo xmlns:a="http://schemas.openxmlformats.org/drawingml/2006/main" xmlns:r="http://schemas.openxmlformats.org/officeDocument/2006/relationships" xmlns:ac="http://schemas.microsoft.com/office/drawing/2013/main/command" xmlns:pc="http://schemas.microsoft.com/office/powerpoint/2013/main/command">
+  <pc:docChgLst>
+    <pc:chgData name="Marie Chris Soque" userId="9ebdbcbf79932a9a" providerId="LiveId" clId="{9996B585-DEE5-4E12-AD1C-26FF1EBC02C0}"/>
+    <pc:docChg chg="custSel modSld">
+      <pc:chgData name="Marie Chris Soque" userId="9ebdbcbf79932a9a" providerId="LiveId" clId="{9996B585-DEE5-4E12-AD1C-26FF1EBC02C0}" dt="2026-09-08T09:24:17.478" v="90" actId="20577"/>
+      <pc:docMkLst>
+        <pc:docMk/>
+      </pc:docMkLst>
+      <pc:sldChg chg="modSp mod">
+        <pc:chgData name="Marie Chris Soque" userId="9ebdbcbf79932a9a" providerId="LiveId" clId="{9996B585-DEE5-4E12-AD1C-26FF1EBC02C0}" dt="2026-09-08T09:24:17.478" v="90" actId="20577"/>
+        <pc:sldMkLst>
+          <pc:docMk/>
+          <pc:sldMk cId="0" sldId="272"/>
+        </pc:sldMkLst>
+        <pc:spChg chg="mod">
+          <ac:chgData name="Marie Chris Soque" userId="9ebdbcbf79932a9a" providerId="LiveId" clId="{9996B585-DEE5-4E12-AD1C-26FF1EBC02C0}" dt="2026-09-08T09:24:17.478" v="90" actId="20577"/>
+          <ac:spMkLst>
+            <pc:docMk/>
+            <pc:sldMk cId="0" sldId="272"/>
+            <ac:spMk id="5" creationId="{00000000-0000-0000-0000-000000000000}"/>
+          </ac:spMkLst>
+        </pc:spChg>
+      </pc:sldChg>
+    </pc:docChg>
+  </pc:docChgLst>
+</pc:chgInfo>
 </file>
 
 <file path=ppt/slideLayouts/slideLayout1.xml><?xml version="1.0" encoding="utf-8"?>
@@ -162,10 +207,9 @@
           <a:lstStyle/>
           <a:p>
             <a:r>
-              <a:rPr lang="en-US" smtClean="0"/>
+              <a:rPr lang="en-US"/>
               <a:t>Click to edit Master title style</a:t>
             </a:r>
-            <a:endParaRPr lang="en-US"/>
           </a:p>
         </p:txBody>
       </p:sp>
@@ -281,10 +325,9 @@
           </a:lstStyle>
           <a:p>
             <a:r>
-              <a:rPr lang="en-US" smtClean="0"/>
+              <a:rPr lang="en-US"/>
               <a:t>Click to edit Master subtitle style</a:t>
             </a:r>
-            <a:endParaRPr lang="en-US"/>
           </a:p>
         </p:txBody>
       </p:sp>
@@ -305,7 +348,7 @@
           <a:p>
             <a:fld id="{5BCAD085-E8A6-8845-BD4E-CB4CCA059FC4}" type="datetimeFigureOut">
               <a:rPr lang="en-US" smtClean="0"/>
-              <a:t>1/27/13</a:t>
+              <a:t>9/8/2026</a:t>
             </a:fld>
             <a:endParaRPr lang="en-US"/>
           </a:p>
@@ -399,10 +442,9 @@
           <a:lstStyle/>
           <a:p>
             <a:r>
-              <a:rPr lang="en-US" smtClean="0"/>
+              <a:rPr lang="en-US"/>
               <a:t>Click to edit Master title style</a:t>
             </a:r>
-            <a:endParaRPr lang="en-US"/>
           </a:p>
         </p:txBody>
       </p:sp>
@@ -423,38 +465,37 @@
           <a:p>
             <a:pPr lvl="0"/>
             <a:r>
-              <a:rPr lang="en-US" smtClean="0"/>
+              <a:rPr lang="en-US"/>
               <a:t>Click to edit Master text styles</a:t>
             </a:r>
           </a:p>
           <a:p>
             <a:pPr lvl="1"/>
             <a:r>
-              <a:rPr lang="en-US" smtClean="0"/>
+              <a:rPr lang="en-US"/>
               <a:t>Second level</a:t>
             </a:r>
           </a:p>
           <a:p>
             <a:pPr lvl="2"/>
             <a:r>
-              <a:rPr lang="en-US" smtClean="0"/>
+              <a:rPr lang="en-US"/>
               <a:t>Third level</a:t>
             </a:r>
           </a:p>
           <a:p>
             <a:pPr lvl="3"/>
             <a:r>
-              <a:rPr lang="en-US" smtClean="0"/>
+              <a:rPr lang="en-US"/>
               <a:t>Fourth level</a:t>
             </a:r>
           </a:p>
           <a:p>
             <a:pPr lvl="4"/>
             <a:r>
-              <a:rPr lang="en-US" smtClean="0"/>
+              <a:rPr lang="en-US"/>
               <a:t>Fifth level</a:t>
             </a:r>
-            <a:endParaRPr lang="en-US"/>
           </a:p>
         </p:txBody>
       </p:sp>
@@ -475,7 +516,7 @@
           <a:p>
             <a:fld id="{5BCAD085-E8A6-8845-BD4E-CB4CCA059FC4}" type="datetimeFigureOut">
               <a:rPr lang="en-US" smtClean="0"/>
-              <a:t>1/27/13</a:t>
+              <a:t>9/8/2026</a:t>
             </a:fld>
             <a:endParaRPr lang="en-US"/>
           </a:p>
@@ -574,10 +615,9 @@
           <a:lstStyle/>
           <a:p>
             <a:r>
-              <a:rPr lang="en-US" smtClean="0"/>
+              <a:rPr lang="en-US"/>
               <a:t>Click to edit Master title style</a:t>
             </a:r>
-            <a:endParaRPr lang="en-US"/>
           </a:p>
         </p:txBody>
       </p:sp>
@@ -603,38 +643,37 @@
           <a:p>
             <a:pPr lvl="0"/>
             <a:r>
-              <a:rPr lang="en-US" smtClean="0"/>
+              <a:rPr lang="en-US"/>
               <a:t>Click to edit Master text styles</a:t>
             </a:r>
           </a:p>
           <a:p>
             <a:pPr lvl="1"/>
             <a:r>
-              <a:rPr lang="en-US" smtClean="0"/>
+              <a:rPr lang="en-US"/>
               <a:t>Second level</a:t>
             </a:r>
           </a:p>
           <a:p>
             <a:pPr lvl="2"/>
             <a:r>
-              <a:rPr lang="en-US" smtClean="0"/>
+              <a:rPr lang="en-US"/>
               <a:t>Third level</a:t>
             </a:r>
           </a:p>
           <a:p>
             <a:pPr lvl="3"/>
             <a:r>
-              <a:rPr lang="en-US" smtClean="0"/>
+              <a:rPr lang="en-US"/>
               <a:t>Fourth level</a:t>
             </a:r>
           </a:p>
           <a:p>
             <a:pPr lvl="4"/>
             <a:r>
-              <a:rPr lang="en-US" smtClean="0"/>
+              <a:rPr lang="en-US"/>
               <a:t>Fifth level</a:t>
             </a:r>
-            <a:endParaRPr lang="en-US"/>
           </a:p>
         </p:txBody>
       </p:sp>
@@ -655,7 +694,7 @@
           <a:p>
             <a:fld id="{5BCAD085-E8A6-8845-BD4E-CB4CCA059FC4}" type="datetimeFigureOut">
               <a:rPr lang="en-US" smtClean="0"/>
-              <a:t>1/27/13</a:t>
+              <a:t>9/8/2026</a:t>
             </a:fld>
             <a:endParaRPr lang="en-US"/>
           </a:p>
@@ -749,10 +788,9 @@
           <a:lstStyle/>
           <a:p>
             <a:r>
-              <a:rPr lang="en-US" smtClean="0"/>
+              <a:rPr lang="en-US"/>
               <a:t>Click to edit Master title style</a:t>
             </a:r>
-            <a:endParaRPr lang="en-US"/>
           </a:p>
         </p:txBody>
       </p:sp>
@@ -773,38 +811,37 @@
           <a:p>
             <a:pPr lvl="0"/>
             <a:r>
-              <a:rPr lang="en-US" smtClean="0"/>
+              <a:rPr lang="en-US"/>
               <a:t>Click to edit Master text styles</a:t>
             </a:r>
           </a:p>
           <a:p>
             <a:pPr lvl="1"/>
             <a:r>
-              <a:rPr lang="en-US" smtClean="0"/>
+              <a:rPr lang="en-US"/>
               <a:t>Second level</a:t>
             </a:r>
           </a:p>
           <a:p>
             <a:pPr lvl="2"/>
             <a:r>
-              <a:rPr lang="en-US" smtClean="0"/>
+              <a:rPr lang="en-US"/>
               <a:t>Third level</a:t>
             </a:r>
           </a:p>
           <a:p>
             <a:pPr lvl="3"/>
             <a:r>
-              <a:rPr lang="en-US" smtClean="0"/>
+              <a:rPr lang="en-US"/>
               <a:t>Fourth level</a:t>
             </a:r>
           </a:p>
           <a:p>
             <a:pPr lvl="4"/>
             <a:r>
-              <a:rPr lang="en-US" smtClean="0"/>
+              <a:rPr lang="en-US"/>
               <a:t>Fifth level</a:t>
             </a:r>
-            <a:endParaRPr lang="en-US"/>
           </a:p>
         </p:txBody>
       </p:sp>
@@ -825,7 +862,7 @@
           <a:p>
             <a:fld id="{5BCAD085-E8A6-8845-BD4E-CB4CCA059FC4}" type="datetimeFigureOut">
               <a:rPr lang="en-US" smtClean="0"/>
-              <a:t>1/27/13</a:t>
+              <a:t>9/8/2026</a:t>
             </a:fld>
             <a:endParaRPr lang="en-US"/>
           </a:p>
@@ -928,10 +965,9 @@
           </a:lstStyle>
           <a:p>
             <a:r>
-              <a:rPr lang="en-US" smtClean="0"/>
+              <a:rPr lang="en-US"/>
               <a:t>Click to edit Master title style</a:t>
             </a:r>
-            <a:endParaRPr lang="en-US"/>
           </a:p>
         </p:txBody>
       </p:sp>
@@ -1048,7 +1084,7 @@
           <a:p>
             <a:pPr lvl="0"/>
             <a:r>
-              <a:rPr lang="en-US" smtClean="0"/>
+              <a:rPr lang="en-US"/>
               <a:t>Click to edit Master text styles</a:t>
             </a:r>
           </a:p>
@@ -1071,7 +1107,7 @@
           <a:p>
             <a:fld id="{5BCAD085-E8A6-8845-BD4E-CB4CCA059FC4}" type="datetimeFigureOut">
               <a:rPr lang="en-US" smtClean="0"/>
-              <a:t>1/27/13</a:t>
+              <a:t>9/8/2026</a:t>
             </a:fld>
             <a:endParaRPr lang="en-US"/>
           </a:p>
@@ -1165,10 +1201,9 @@
           <a:lstStyle/>
           <a:p>
             <a:r>
-              <a:rPr lang="en-US" smtClean="0"/>
+              <a:rPr lang="en-US"/>
               <a:t>Click to edit Master title style</a:t>
             </a:r>
-            <a:endParaRPr lang="en-US"/>
           </a:p>
         </p:txBody>
       </p:sp>
@@ -1222,38 +1257,37 @@
           <a:p>
             <a:pPr lvl="0"/>
             <a:r>
-              <a:rPr lang="en-US" smtClean="0"/>
+              <a:rPr lang="en-US"/>
               <a:t>Click to edit Master text styles</a:t>
             </a:r>
           </a:p>
           <a:p>
             <a:pPr lvl="1"/>
             <a:r>
-              <a:rPr lang="en-US" smtClean="0"/>
+              <a:rPr lang="en-US"/>
               <a:t>Second level</a:t>
             </a:r>
           </a:p>
           <a:p>
             <a:pPr lvl="2"/>
             <a:r>
-              <a:rPr lang="en-US" smtClean="0"/>
+              <a:rPr lang="en-US"/>
               <a:t>Third level</a:t>
             </a:r>
           </a:p>
           <a:p>
             <a:pPr lvl="3"/>
             <a:r>
-              <a:rPr lang="en-US" smtClean="0"/>
+              <a:rPr lang="en-US"/>
               <a:t>Fourth level</a:t>
             </a:r>
           </a:p>
           <a:p>
             <a:pPr lvl="4"/>
             <a:r>
-              <a:rPr lang="en-US" smtClean="0"/>
+              <a:rPr lang="en-US"/>
               <a:t>Fifth level</a:t>
             </a:r>
-            <a:endParaRPr lang="en-US"/>
           </a:p>
         </p:txBody>
       </p:sp>
@@ -1307,38 +1341,37 @@
           <a:p>
             <a:pPr lvl="0"/>
             <a:r>
-              <a:rPr lang="en-US" smtClean="0"/>
+              <a:rPr lang="en-US"/>
               <a:t>Click to edit Master text styles</a:t>
             </a:r>
           </a:p>
           <a:p>
             <a:pPr lvl="1"/>
             <a:r>
-              <a:rPr lang="en-US" smtClean="0"/>
+              <a:rPr lang="en-US"/>
               <a:t>Second level</a:t>
             </a:r>
           </a:p>
           <a:p>
             <a:pPr lvl="2"/>
             <a:r>
-              <a:rPr lang="en-US" smtClean="0"/>
+              <a:rPr lang="en-US"/>
               <a:t>Third level</a:t>
             </a:r>
           </a:p>
           <a:p>
             <a:pPr lvl="3"/>
             <a:r>
-              <a:rPr lang="en-US" smtClean="0"/>
+              <a:rPr lang="en-US"/>
               <a:t>Fourth level</a:t>
             </a:r>
           </a:p>
           <a:p>
             <a:pPr lvl="4"/>
             <a:r>
-              <a:rPr lang="en-US" smtClean="0"/>
+              <a:rPr lang="en-US"/>
               <a:t>Fifth level</a:t>
             </a:r>
-            <a:endParaRPr lang="en-US"/>
           </a:p>
         </p:txBody>
       </p:sp>
@@ -1359,7 +1392,7 @@
           <a:p>
             <a:fld id="{5BCAD085-E8A6-8845-BD4E-CB4CCA059FC4}" type="datetimeFigureOut">
               <a:rPr lang="en-US" smtClean="0"/>
-              <a:t>1/27/13</a:t>
+              <a:t>9/8/2026</a:t>
             </a:fld>
             <a:endParaRPr lang="en-US"/>
           </a:p>
@@ -1457,10 +1490,9 @@
           </a:lstStyle>
           <a:p>
             <a:r>
-              <a:rPr lang="en-US" smtClean="0"/>
+              <a:rPr lang="en-US"/>
               <a:t>Click to edit Master title style</a:t>
             </a:r>
-            <a:endParaRPr lang="en-US"/>
           </a:p>
         </p:txBody>
       </p:sp>
@@ -1523,7 +1555,7 @@
           <a:p>
             <a:pPr lvl="0"/>
             <a:r>
-              <a:rPr lang="en-US" smtClean="0"/>
+              <a:rPr lang="en-US"/>
               <a:t>Click to edit Master text styles</a:t>
             </a:r>
           </a:p>
@@ -1579,38 +1611,37 @@
           <a:p>
             <a:pPr lvl="0"/>
             <a:r>
-              <a:rPr lang="en-US" smtClean="0"/>
+              <a:rPr lang="en-US"/>
               <a:t>Click to edit Master text styles</a:t>
             </a:r>
           </a:p>
           <a:p>
             <a:pPr lvl="1"/>
             <a:r>
-              <a:rPr lang="en-US" smtClean="0"/>
+              <a:rPr lang="en-US"/>
               <a:t>Second level</a:t>
             </a:r>
           </a:p>
           <a:p>
             <a:pPr lvl="2"/>
             <a:r>
-              <a:rPr lang="en-US" smtClean="0"/>
+              <a:rPr lang="en-US"/>
               <a:t>Third level</a:t>
             </a:r>
           </a:p>
           <a:p>
             <a:pPr lvl="3"/>
             <a:r>
-              <a:rPr lang="en-US" smtClean="0"/>
+              <a:rPr lang="en-US"/>
               <a:t>Fourth level</a:t>
             </a:r>
           </a:p>
           <a:p>
             <a:pPr lvl="4"/>
             <a:r>
-              <a:rPr lang="en-US" smtClean="0"/>
+              <a:rPr lang="en-US"/>
               <a:t>Fifth level</a:t>
             </a:r>
-            <a:endParaRPr lang="en-US"/>
           </a:p>
         </p:txBody>
       </p:sp>
@@ -1673,7 +1704,7 @@
           <a:p>
             <a:pPr lvl="0"/>
             <a:r>
-              <a:rPr lang="en-US" smtClean="0"/>
+              <a:rPr lang="en-US"/>
               <a:t>Click to edit Master text styles</a:t>
             </a:r>
           </a:p>
@@ -1729,38 +1760,37 @@
           <a:p>
             <a:pPr lvl="0"/>
             <a:r>
-              <a:rPr lang="en-US" smtClean="0"/>
+              <a:rPr lang="en-US"/>
               <a:t>Click to edit Master text styles</a:t>
             </a:r>
           </a:p>
           <a:p>
             <a:pPr lvl="1"/>
             <a:r>
-              <a:rPr lang="en-US" smtClean="0"/>
+              <a:rPr lang="en-US"/>
               <a:t>Second level</a:t>
             </a:r>
           </a:p>
           <a:p>
             <a:pPr lvl="2"/>
             <a:r>
-              <a:rPr lang="en-US" smtClean="0"/>
+              <a:rPr lang="en-US"/>
               <a:t>Third level</a:t>
             </a:r>
           </a:p>
           <a:p>
             <a:pPr lvl="3"/>
             <a:r>
-              <a:rPr lang="en-US" smtClean="0"/>
+              <a:rPr lang="en-US"/>
               <a:t>Fourth level</a:t>
             </a:r>
           </a:p>
           <a:p>
             <a:pPr lvl="4"/>
             <a:r>
-              <a:rPr lang="en-US" smtClean="0"/>
+              <a:rPr lang="en-US"/>
               <a:t>Fifth level</a:t>
             </a:r>
-            <a:endParaRPr lang="en-US"/>
           </a:p>
         </p:txBody>
       </p:sp>
@@ -1781,7 +1811,7 @@
           <a:p>
             <a:fld id="{5BCAD085-E8A6-8845-BD4E-CB4CCA059FC4}" type="datetimeFigureOut">
               <a:rPr lang="en-US" smtClean="0"/>
-              <a:t>1/27/13</a:t>
+              <a:t>9/8/2026</a:t>
             </a:fld>
             <a:endParaRPr lang="en-US"/>
           </a:p>
@@ -1875,10 +1905,9 @@
           <a:lstStyle/>
           <a:p>
             <a:r>
-              <a:rPr lang="en-US" smtClean="0"/>
+              <a:rPr lang="en-US"/>
               <a:t>Click to edit Master title style</a:t>
             </a:r>
-            <a:endParaRPr lang="en-US"/>
           </a:p>
         </p:txBody>
       </p:sp>
@@ -1899,7 +1928,7 @@
           <a:p>
             <a:fld id="{5BCAD085-E8A6-8845-BD4E-CB4CCA059FC4}" type="datetimeFigureOut">
               <a:rPr lang="en-US" smtClean="0"/>
-              <a:t>1/27/13</a:t>
+              <a:t>9/8/2026</a:t>
             </a:fld>
             <a:endParaRPr lang="en-US"/>
           </a:p>
@@ -1994,7 +2023,7 @@
           <a:p>
             <a:fld id="{5BCAD085-E8A6-8845-BD4E-CB4CCA059FC4}" type="datetimeFigureOut">
               <a:rPr lang="en-US" smtClean="0"/>
-              <a:t>1/27/13</a:t>
+              <a:t>9/8/2026</a:t>
             </a:fld>
             <a:endParaRPr lang="en-US"/>
           </a:p>
@@ -2097,10 +2126,9 @@
           </a:lstStyle>
           <a:p>
             <a:r>
-              <a:rPr lang="en-US" smtClean="0"/>
+              <a:rPr lang="en-US"/>
               <a:t>Click to edit Master title style</a:t>
             </a:r>
-            <a:endParaRPr lang="en-US"/>
           </a:p>
         </p:txBody>
       </p:sp>
@@ -2154,38 +2182,37 @@
           <a:p>
             <a:pPr lvl="0"/>
             <a:r>
-              <a:rPr lang="en-US" smtClean="0"/>
+              <a:rPr lang="en-US"/>
               <a:t>Click to edit Master text styles</a:t>
             </a:r>
           </a:p>
           <a:p>
             <a:pPr lvl="1"/>
             <a:r>
-              <a:rPr lang="en-US" smtClean="0"/>
+              <a:rPr lang="en-US"/>
               <a:t>Second level</a:t>
             </a:r>
           </a:p>
           <a:p>
             <a:pPr lvl="2"/>
             <a:r>
-              <a:rPr lang="en-US" smtClean="0"/>
+              <a:rPr lang="en-US"/>
               <a:t>Third level</a:t>
             </a:r>
           </a:p>
           <a:p>
             <a:pPr lvl="3"/>
             <a:r>
-              <a:rPr lang="en-US" smtClean="0"/>
+              <a:rPr lang="en-US"/>
               <a:t>Fourth level</a:t>
             </a:r>
           </a:p>
           <a:p>
             <a:pPr lvl="4"/>
             <a:r>
-              <a:rPr lang="en-US" smtClean="0"/>
+              <a:rPr lang="en-US"/>
               <a:t>Fifth level</a:t>
             </a:r>
-            <a:endParaRPr lang="en-US"/>
           </a:p>
         </p:txBody>
       </p:sp>
@@ -2248,7 +2275,7 @@
           <a:p>
             <a:pPr lvl="0"/>
             <a:r>
-              <a:rPr lang="en-US" smtClean="0"/>
+              <a:rPr lang="en-US"/>
               <a:t>Click to edit Master text styles</a:t>
             </a:r>
           </a:p>
@@ -2271,7 +2298,7 @@
           <a:p>
             <a:fld id="{5BCAD085-E8A6-8845-BD4E-CB4CCA059FC4}" type="datetimeFigureOut">
               <a:rPr lang="en-US" smtClean="0"/>
-              <a:t>1/27/13</a:t>
+              <a:t>9/8/2026</a:t>
             </a:fld>
             <a:endParaRPr lang="en-US"/>
           </a:p>
@@ -2374,10 +2401,9 @@
           </a:lstStyle>
           <a:p>
             <a:r>
-              <a:rPr lang="en-US" smtClean="0"/>
+              <a:rPr lang="en-US"/>
               <a:t>Click to edit Master title style</a:t>
             </a:r>
-            <a:endParaRPr lang="en-US"/>
           </a:p>
         </p:txBody>
       </p:sp>
@@ -2501,7 +2527,7 @@
           <a:p>
             <a:pPr lvl="0"/>
             <a:r>
-              <a:rPr lang="en-US" smtClean="0"/>
+              <a:rPr lang="en-US"/>
               <a:t>Click to edit Master text styles</a:t>
             </a:r>
           </a:p>
@@ -2524,7 +2550,7 @@
           <a:p>
             <a:fld id="{5BCAD085-E8A6-8845-BD4E-CB4CCA059FC4}" type="datetimeFigureOut">
               <a:rPr lang="en-US" smtClean="0"/>
-              <a:t>1/27/13</a:t>
+              <a:t>9/8/2026</a:t>
             </a:fld>
             <a:endParaRPr lang="en-US"/>
           </a:p>
@@ -2633,10 +2659,9 @@
           <a:lstStyle/>
           <a:p>
             <a:r>
-              <a:rPr lang="en-US" smtClean="0"/>
+              <a:rPr lang="en-US"/>
               <a:t>Click to edit Master title style</a:t>
             </a:r>
-            <a:endParaRPr lang="en-US"/>
           </a:p>
         </p:txBody>
       </p:sp>
@@ -2667,38 +2692,37 @@
           <a:p>
             <a:pPr lvl="0"/>
             <a:r>
-              <a:rPr lang="en-US" smtClean="0"/>
+              <a:rPr lang="en-US"/>
               <a:t>Click to edit Master text styles</a:t>
             </a:r>
           </a:p>
           <a:p>
             <a:pPr lvl="1"/>
             <a:r>
-              <a:rPr lang="en-US" smtClean="0"/>
+              <a:rPr lang="en-US"/>
               <a:t>Second level</a:t>
             </a:r>
           </a:p>
           <a:p>
             <a:pPr lvl="2"/>
             <a:r>
-              <a:rPr lang="en-US" smtClean="0"/>
+              <a:rPr lang="en-US"/>
               <a:t>Third level</a:t>
             </a:r>
           </a:p>
           <a:p>
             <a:pPr lvl="3"/>
             <a:r>
-              <a:rPr lang="en-US" smtClean="0"/>
+              <a:rPr lang="en-US"/>
               <a:t>Fourth level</a:t>
             </a:r>
           </a:p>
           <a:p>
             <a:pPr lvl="4"/>
             <a:r>
-              <a:rPr lang="en-US" smtClean="0"/>
+              <a:rPr lang="en-US"/>
               <a:t>Fifth level</a:t>
             </a:r>
-            <a:endParaRPr lang="en-US"/>
           </a:p>
         </p:txBody>
       </p:sp>
@@ -2737,7 +2761,7 @@
           <a:p>
             <a:fld id="{5BCAD085-E8A6-8845-BD4E-CB4CCA059FC4}" type="datetimeFigureOut">
               <a:rPr lang="en-US" smtClean="0"/>
-              <a:t>1/27/13</a:t>
+              <a:t>9/8/2026</a:t>
             </a:fld>
             <a:endParaRPr lang="en-US"/>
           </a:p>
@@ -3096,7 +3120,7 @@
 </file>
 
 <file path=ppt/slides/slide1.xml><?xml version="1.0" encoding="utf-8"?>
-<p:sld xmlns:a="http://schemas.openxmlformats.org/drawingml/2006/main" xmlns:p="http://schemas.openxmlformats.org/presentationml/2006/main" xmlns:r="http://schemas.openxmlformats.org/officeDocument/2006/relationships">
+<p:sld xmlns:a="http://schemas.openxmlformats.org/drawingml/2006/main" xmlns:r="http://schemas.openxmlformats.org/officeDocument/2006/relationships" xmlns:p="http://schemas.openxmlformats.org/presentationml/2006/main">
   <p:cSld>
     <p:bg>
       <p:bgPr>
@@ -3112,7 +3136,14 @@
         <p:cNvGrpSpPr/>
         <p:nvPr/>
       </p:nvGrpSpPr>
-      <p:grpSpPr/>
+      <p:grpSpPr>
+        <a:xfrm>
+          <a:off x="0" y="0"/>
+          <a:ext cx="0" cy="0"/>
+          <a:chOff x="0" y="0"/>
+          <a:chExt cx="0" cy="0"/>
+        </a:xfrm>
+      </p:grpSpPr>
       <p:pic>
         <p:nvPicPr>
           <p:cNvPr id="2" name="Picture 1" descr="image.png"/>
@@ -3154,7 +3185,7 @@
           <a:noFill/>
         </p:spPr>
         <p:txBody>
-          <a:bodyPr wrap="square" lIns="0" rIns="0" tIns="0" bIns="0" anchor="t">
+          <a:bodyPr wrap="square" lIns="0" tIns="0" rIns="0" bIns="0" anchor="t">
             <a:spAutoFit/>
           </a:bodyPr>
           <a:lstStyle/>
@@ -3165,7 +3196,7 @@
               </a:lnSpc>
             </a:pPr>
             <a:r>
-              <a:rPr b="1" sz="3900" i="0" u="none">
+              <a:rPr sz="3900" b="1" i="0" u="none">
                 <a:solidFill>
                   <a:srgbClr val="0F172A"/>
                 </a:solidFill>
@@ -3193,7 +3224,7 @@
           <a:noFill/>
         </p:spPr>
         <p:txBody>
-          <a:bodyPr wrap="square" lIns="0" rIns="0" tIns="0" bIns="0" anchor="t">
+          <a:bodyPr wrap="square" lIns="0" tIns="0" rIns="0" bIns="0" anchor="t">
             <a:spAutoFit/>
           </a:bodyPr>
           <a:lstStyle/>
@@ -3204,7 +3235,7 @@
               </a:lnSpc>
             </a:pPr>
             <a:r>
-              <a:rPr b="0" sz="1500" i="0" u="none">
+              <a:rPr sz="1500" b="0" i="0" u="none">
                 <a:solidFill>
                   <a:srgbClr val="2563EB"/>
                 </a:solidFill>
@@ -3272,7 +3303,7 @@
 </file>
 
 <file path=ppt/slides/slide10.xml><?xml version="1.0" encoding="utf-8"?>
-<p:sld xmlns:a="http://schemas.openxmlformats.org/drawingml/2006/main" xmlns:p="http://schemas.openxmlformats.org/presentationml/2006/main" xmlns:r="http://schemas.openxmlformats.org/officeDocument/2006/relationships">
+<p:sld xmlns:a="http://schemas.openxmlformats.org/drawingml/2006/main" xmlns:r="http://schemas.openxmlformats.org/officeDocument/2006/relationships" xmlns:p="http://schemas.openxmlformats.org/presentationml/2006/main">
   <p:cSld>
     <p:bg>
       <p:bgPr>
@@ -3288,7 +3319,14 @@
         <p:cNvGrpSpPr/>
         <p:nvPr/>
       </p:nvGrpSpPr>
-      <p:grpSpPr/>
+      <p:grpSpPr>
+        <a:xfrm>
+          <a:off x="0" y="0"/>
+          <a:ext cx="0" cy="0"/>
+          <a:chOff x="0" y="0"/>
+          <a:chExt cx="0" cy="0"/>
+        </a:xfrm>
+      </p:grpSpPr>
       <p:pic>
         <p:nvPicPr>
           <p:cNvPr id="2" name="Picture 1" descr="image.png"/>
@@ -3426,7 +3464,7 @@
           <a:noFill/>
         </p:spPr>
         <p:txBody>
-          <a:bodyPr wrap="square" lIns="0" rIns="0" tIns="0" bIns="0" anchor="t">
+          <a:bodyPr wrap="square" lIns="0" tIns="0" rIns="0" bIns="0" anchor="t">
             <a:spAutoFit/>
           </a:bodyPr>
           <a:lstStyle/>
@@ -3437,7 +3475,7 @@
               </a:lnSpc>
             </a:pPr>
             <a:r>
-              <a:rPr b="0" sz="1200" i="0" u="none">
+              <a:rPr sz="1200" b="0" i="0" u="none">
                 <a:solidFill>
                   <a:srgbClr val="1E293B"/>
                 </a:solidFill>
@@ -3513,14 +3551,14 @@
           <a:noFill/>
         </p:spPr>
         <p:txBody>
-          <a:bodyPr wrap="square" lIns="0" rIns="0" tIns="0" bIns="0" anchor="t">
+          <a:bodyPr wrap="square" lIns="0" tIns="0" rIns="0" bIns="0" anchor="t">
             <a:spAutoFit/>
           </a:bodyPr>
           <a:lstStyle/>
           <a:p>
             <a:pPr algn="l"/>
             <a:r>
-              <a:rPr b="0" sz="1500" i="0" u="none">
+              <a:rPr sz="1500" b="0" i="0" u="none">
                 <a:solidFill>
                   <a:srgbClr val="1E293B"/>
                 </a:solidFill>
@@ -3548,7 +3586,7 @@
           <a:noFill/>
         </p:spPr>
         <p:txBody>
-          <a:bodyPr wrap="square" lIns="0" rIns="0" tIns="0" bIns="0" anchor="t">
+          <a:bodyPr wrap="square" lIns="0" tIns="0" rIns="0" bIns="0" anchor="t">
             <a:spAutoFit/>
           </a:bodyPr>
           <a:lstStyle/>
@@ -3559,7 +3597,7 @@
               </a:lnSpc>
             </a:pPr>
             <a:r>
-              <a:rPr b="0" sz="1125" i="0" u="none">
+              <a:rPr sz="1125" b="0" i="0" u="none">
                 <a:solidFill>
                   <a:srgbClr val="475569"/>
                 </a:solidFill>
@@ -3611,14 +3649,14 @@
           <a:noFill/>
         </p:spPr>
         <p:txBody>
-          <a:bodyPr wrap="square" lIns="0" rIns="0" tIns="0" bIns="0" anchor="t">
+          <a:bodyPr wrap="square" lIns="0" tIns="0" rIns="0" bIns="0" anchor="t">
             <a:spAutoFit/>
           </a:bodyPr>
           <a:lstStyle/>
           <a:p>
             <a:pPr algn="l"/>
             <a:r>
-              <a:rPr b="0" sz="1500" i="0" u="none">
+              <a:rPr sz="1500" b="0" i="0" u="none">
                 <a:solidFill>
                   <a:srgbClr val="1E293B"/>
                 </a:solidFill>
@@ -3646,7 +3684,7 @@
           <a:noFill/>
         </p:spPr>
         <p:txBody>
-          <a:bodyPr wrap="square" lIns="0" rIns="0" tIns="0" bIns="0" anchor="t">
+          <a:bodyPr wrap="square" lIns="0" tIns="0" rIns="0" bIns="0" anchor="t">
             <a:spAutoFit/>
           </a:bodyPr>
           <a:lstStyle/>
@@ -3657,7 +3695,7 @@
               </a:lnSpc>
             </a:pPr>
             <a:r>
-              <a:rPr b="0" sz="1125" i="0" u="none">
+              <a:rPr sz="1125" b="0" i="0" u="none">
                 <a:solidFill>
                   <a:srgbClr val="475569"/>
                 </a:solidFill>
@@ -3709,14 +3747,14 @@
           <a:noFill/>
         </p:spPr>
         <p:txBody>
-          <a:bodyPr wrap="square" lIns="0" rIns="0" tIns="0" bIns="0" anchor="t">
+          <a:bodyPr wrap="square" lIns="0" tIns="0" rIns="0" bIns="0" anchor="t">
             <a:spAutoFit/>
           </a:bodyPr>
           <a:lstStyle/>
           <a:p>
             <a:pPr algn="l"/>
             <a:r>
-              <a:rPr b="0" sz="1500" i="0" u="none">
+              <a:rPr sz="1500" b="0" i="0" u="none">
                 <a:solidFill>
                   <a:srgbClr val="1E293B"/>
                 </a:solidFill>
@@ -3744,7 +3782,7 @@
           <a:noFill/>
         </p:spPr>
         <p:txBody>
-          <a:bodyPr wrap="square" lIns="0" rIns="0" tIns="0" bIns="0" anchor="t">
+          <a:bodyPr wrap="square" lIns="0" tIns="0" rIns="0" bIns="0" anchor="t">
             <a:spAutoFit/>
           </a:bodyPr>
           <a:lstStyle/>
@@ -3755,7 +3793,7 @@
               </a:lnSpc>
             </a:pPr>
             <a:r>
-              <a:rPr b="0" sz="1125" i="0" u="none">
+              <a:rPr sz="1125" b="0" i="0" u="none">
                 <a:solidFill>
                   <a:srgbClr val="475569"/>
                 </a:solidFill>
@@ -3855,14 +3893,14 @@
           <a:noFill/>
         </p:spPr>
         <p:txBody>
-          <a:bodyPr wrap="square" lIns="0" rIns="0" tIns="0" bIns="0" anchor="t">
+          <a:bodyPr wrap="square" lIns="0" tIns="0" rIns="0" bIns="0" anchor="t">
             <a:spAutoFit/>
           </a:bodyPr>
           <a:lstStyle/>
           <a:p>
             <a:pPr algn="l"/>
             <a:r>
-              <a:rPr b="1" sz="2550" i="0" u="none">
+              <a:rPr sz="2550" b="1" i="0" u="none">
                 <a:solidFill>
                   <a:srgbClr val="0F172A"/>
                 </a:solidFill>
@@ -3882,7 +3920,7 @@
 </file>
 
 <file path=ppt/slides/slide11.xml><?xml version="1.0" encoding="utf-8"?>
-<p:sld xmlns:a="http://schemas.openxmlformats.org/drawingml/2006/main" xmlns:p="http://schemas.openxmlformats.org/presentationml/2006/main" xmlns:r="http://schemas.openxmlformats.org/officeDocument/2006/relationships">
+<p:sld xmlns:a="http://schemas.openxmlformats.org/drawingml/2006/main" xmlns:r="http://schemas.openxmlformats.org/officeDocument/2006/relationships" xmlns:p="http://schemas.openxmlformats.org/presentationml/2006/main">
   <p:cSld>
     <p:bg>
       <p:bgPr>
@@ -3898,7 +3936,14 @@
         <p:cNvGrpSpPr/>
         <p:nvPr/>
       </p:nvGrpSpPr>
-      <p:grpSpPr/>
+      <p:grpSpPr>
+        <a:xfrm>
+          <a:off x="0" y="0"/>
+          <a:ext cx="0" cy="0"/>
+          <a:chOff x="0" y="0"/>
+          <a:chExt cx="0" cy="0"/>
+        </a:xfrm>
+      </p:grpSpPr>
       <p:pic>
         <p:nvPicPr>
           <p:cNvPr id="2" name="Picture 1" descr="image.png"/>
@@ -3988,14 +4033,14 @@
           <a:noFill/>
         </p:spPr>
         <p:txBody>
-          <a:bodyPr wrap="square" lIns="0" rIns="0" tIns="0" bIns="0" anchor="t">
+          <a:bodyPr wrap="square" lIns="0" tIns="0" rIns="0" bIns="0" anchor="t">
             <a:spAutoFit/>
           </a:bodyPr>
           <a:lstStyle/>
           <a:p>
             <a:pPr algn="ctr"/>
             <a:r>
-              <a:rPr b="1" sz="3600" i="0" u="none">
+              <a:rPr sz="3600" b="1" i="0" u="none">
                 <a:solidFill>
                   <a:srgbClr val="FFFFFF"/>
                 </a:solidFill>
@@ -4047,6 +4092,7 @@
           <a:lstStyle/>
           <a:p>
             <a:pPr algn="ctr"/>
+            <a:endParaRPr/>
           </a:p>
         </p:txBody>
       </p:sp>
@@ -4067,7 +4113,7 @@
           <a:noFill/>
         </p:spPr>
         <p:txBody>
-          <a:bodyPr wrap="square" lIns="0" rIns="0" tIns="0" bIns="0" anchor="t">
+          <a:bodyPr wrap="square" lIns="0" tIns="0" rIns="0" bIns="0" anchor="t">
             <a:spAutoFit/>
           </a:bodyPr>
           <a:lstStyle/>
@@ -4078,7 +4124,7 @@
               </a:lnSpc>
             </a:pPr>
             <a:r>
-              <a:rPr b="0" sz="1425" i="0" u="none">
+              <a:rPr sz="1425" b="0" i="0" u="none">
                 <a:solidFill>
                   <a:srgbClr val="94A3B8"/>
                 </a:solidFill>
@@ -4098,7 +4144,7 @@
 </file>
 
 <file path=ppt/slides/slide12.xml><?xml version="1.0" encoding="utf-8"?>
-<p:sld xmlns:a="http://schemas.openxmlformats.org/drawingml/2006/main" xmlns:p="http://schemas.openxmlformats.org/presentationml/2006/main" xmlns:r="http://schemas.openxmlformats.org/officeDocument/2006/relationships">
+<p:sld xmlns:a="http://schemas.openxmlformats.org/drawingml/2006/main" xmlns:r="http://schemas.openxmlformats.org/officeDocument/2006/relationships" xmlns:p="http://schemas.openxmlformats.org/presentationml/2006/main">
   <p:cSld>
     <p:bg>
       <p:bgPr>
@@ -4114,7 +4160,14 @@
         <p:cNvGrpSpPr/>
         <p:nvPr/>
       </p:nvGrpSpPr>
-      <p:grpSpPr/>
+      <p:grpSpPr>
+        <a:xfrm>
+          <a:off x="0" y="0"/>
+          <a:ext cx="0" cy="0"/>
+          <a:chOff x="0" y="0"/>
+          <a:chExt cx="0" cy="0"/>
+        </a:xfrm>
+      </p:grpSpPr>
       <p:pic>
         <p:nvPicPr>
           <p:cNvPr id="2" name="Picture 1" descr="image.png"/>
@@ -4252,14 +4305,14 @@
           <a:noFill/>
         </p:spPr>
         <p:txBody>
-          <a:bodyPr wrap="square" lIns="0" rIns="0" tIns="0" bIns="0" anchor="t">
+          <a:bodyPr wrap="square" lIns="0" tIns="0" rIns="0" bIns="0" anchor="t">
             <a:spAutoFit/>
           </a:bodyPr>
           <a:lstStyle/>
           <a:p>
             <a:pPr algn="l"/>
             <a:r>
-              <a:rPr b="0" sz="1500" i="0" u="none">
+              <a:rPr sz="1500" b="0" i="0" u="none">
                 <a:solidFill>
                   <a:srgbClr val="1E293B"/>
                 </a:solidFill>
@@ -4287,7 +4340,7 @@
           <a:noFill/>
         </p:spPr>
         <p:txBody>
-          <a:bodyPr wrap="square" lIns="0" rIns="0" tIns="0" bIns="0" anchor="t">
+          <a:bodyPr wrap="square" lIns="0" tIns="0" rIns="0" bIns="0" anchor="t">
             <a:spAutoFit/>
           </a:bodyPr>
           <a:lstStyle/>
@@ -4298,7 +4351,7 @@
               </a:lnSpc>
             </a:pPr>
             <a:r>
-              <a:rPr b="0" sz="1125" i="0" u="none">
+              <a:rPr sz="1125" b="0" i="0" u="none">
                 <a:solidFill>
                   <a:srgbClr val="475569"/>
                 </a:solidFill>
@@ -4350,14 +4403,14 @@
           <a:noFill/>
         </p:spPr>
         <p:txBody>
-          <a:bodyPr wrap="square" lIns="0" rIns="0" tIns="0" bIns="0" anchor="t">
+          <a:bodyPr wrap="square" lIns="0" tIns="0" rIns="0" bIns="0" anchor="t">
             <a:spAutoFit/>
           </a:bodyPr>
           <a:lstStyle/>
           <a:p>
             <a:pPr algn="l"/>
             <a:r>
-              <a:rPr b="0" sz="1500" i="0" u="none">
+              <a:rPr sz="1500" b="0" i="0" u="none">
                 <a:solidFill>
                   <a:srgbClr val="1E293B"/>
                 </a:solidFill>
@@ -4385,7 +4438,7 @@
           <a:noFill/>
         </p:spPr>
         <p:txBody>
-          <a:bodyPr wrap="square" lIns="0" rIns="0" tIns="0" bIns="0" anchor="t">
+          <a:bodyPr wrap="square" lIns="0" tIns="0" rIns="0" bIns="0" anchor="t">
             <a:spAutoFit/>
           </a:bodyPr>
           <a:lstStyle/>
@@ -4396,7 +4449,7 @@
               </a:lnSpc>
             </a:pPr>
             <a:r>
-              <a:rPr b="0" sz="1125" i="0" u="none">
+              <a:rPr sz="1125" b="0" i="0" u="none">
                 <a:solidFill>
                   <a:srgbClr val="475569"/>
                 </a:solidFill>
@@ -4448,14 +4501,14 @@
           <a:noFill/>
         </p:spPr>
         <p:txBody>
-          <a:bodyPr wrap="square" lIns="0" rIns="0" tIns="0" bIns="0" anchor="t">
+          <a:bodyPr wrap="square" lIns="0" tIns="0" rIns="0" bIns="0" anchor="t">
             <a:spAutoFit/>
           </a:bodyPr>
           <a:lstStyle/>
           <a:p>
             <a:pPr algn="l"/>
             <a:r>
-              <a:rPr b="0" sz="1500" i="0" u="none">
+              <a:rPr sz="1500" b="0" i="0" u="none">
                 <a:solidFill>
                   <a:srgbClr val="1E293B"/>
                 </a:solidFill>
@@ -4483,7 +4536,7 @@
           <a:noFill/>
         </p:spPr>
         <p:txBody>
-          <a:bodyPr wrap="square" lIns="0" rIns="0" tIns="0" bIns="0" anchor="t">
+          <a:bodyPr wrap="square" lIns="0" tIns="0" rIns="0" bIns="0" anchor="t">
             <a:spAutoFit/>
           </a:bodyPr>
           <a:lstStyle/>
@@ -4494,7 +4547,7 @@
               </a:lnSpc>
             </a:pPr>
             <a:r>
-              <a:rPr b="0" sz="1125" i="0" u="none">
+              <a:rPr sz="1125" b="0" i="0" u="none">
                 <a:solidFill>
                   <a:srgbClr val="475569"/>
                 </a:solidFill>
@@ -4594,14 +4647,14 @@
           <a:noFill/>
         </p:spPr>
         <p:txBody>
-          <a:bodyPr wrap="square" lIns="0" rIns="0" tIns="0" bIns="0" anchor="t">
+          <a:bodyPr wrap="square" lIns="0" tIns="0" rIns="0" bIns="0" anchor="t">
             <a:spAutoFit/>
           </a:bodyPr>
           <a:lstStyle/>
           <a:p>
             <a:pPr algn="l"/>
             <a:r>
-              <a:rPr b="1" sz="2550" i="0" u="none">
+              <a:rPr sz="2550" b="1" i="0" u="none">
                 <a:solidFill>
                   <a:srgbClr val="0F172A"/>
                 </a:solidFill>
@@ -4621,7 +4674,7 @@
 </file>
 
 <file path=ppt/slides/slide13.xml><?xml version="1.0" encoding="utf-8"?>
-<p:sld xmlns:a="http://schemas.openxmlformats.org/drawingml/2006/main" xmlns:p="http://schemas.openxmlformats.org/presentationml/2006/main" xmlns:r="http://schemas.openxmlformats.org/officeDocument/2006/relationships">
+<p:sld xmlns:a="http://schemas.openxmlformats.org/drawingml/2006/main" xmlns:r="http://schemas.openxmlformats.org/officeDocument/2006/relationships" xmlns:p="http://schemas.openxmlformats.org/presentationml/2006/main">
   <p:cSld>
     <p:bg>
       <p:bgPr>
@@ -4637,7 +4690,14 @@
         <p:cNvGrpSpPr/>
         <p:nvPr/>
       </p:nvGrpSpPr>
-      <p:grpSpPr/>
+      <p:grpSpPr>
+        <a:xfrm>
+          <a:off x="0" y="0"/>
+          <a:ext cx="0" cy="0"/>
+          <a:chOff x="0" y="0"/>
+          <a:chExt cx="0" cy="0"/>
+        </a:xfrm>
+      </p:grpSpPr>
       <p:pic>
         <p:nvPicPr>
           <p:cNvPr id="2" name="Picture 1" descr="image.png"/>
@@ -4775,7 +4835,7 @@
           <a:noFill/>
         </p:spPr>
         <p:txBody>
-          <a:bodyPr wrap="square" lIns="0" rIns="0" tIns="0" bIns="0" anchor="t">
+          <a:bodyPr wrap="square" lIns="0" tIns="0" rIns="0" bIns="0" anchor="t">
             <a:spAutoFit/>
           </a:bodyPr>
           <a:lstStyle/>
@@ -4786,7 +4846,7 @@
               </a:lnSpc>
             </a:pPr>
             <a:r>
-              <a:rPr b="0" sz="1200" i="0" u="none">
+              <a:rPr sz="1200" b="0" i="0" u="none">
                 <a:solidFill>
                   <a:srgbClr val="1E293B"/>
                 </a:solidFill>
@@ -4862,14 +4922,14 @@
           <a:noFill/>
         </p:spPr>
         <p:txBody>
-          <a:bodyPr wrap="square" lIns="0" rIns="0" tIns="0" bIns="0" anchor="t">
+          <a:bodyPr wrap="square" lIns="0" tIns="0" rIns="0" bIns="0" anchor="t">
             <a:spAutoFit/>
           </a:bodyPr>
           <a:lstStyle/>
           <a:p>
             <a:pPr algn="l"/>
             <a:r>
-              <a:rPr b="0" sz="1500" i="0" u="none">
+              <a:rPr sz="1500" b="0" i="0" u="none">
                 <a:solidFill>
                   <a:srgbClr val="1E293B"/>
                 </a:solidFill>
@@ -4897,7 +4957,7 @@
           <a:noFill/>
         </p:spPr>
         <p:txBody>
-          <a:bodyPr wrap="square" lIns="0" rIns="0" tIns="0" bIns="0" anchor="t">
+          <a:bodyPr wrap="square" lIns="0" tIns="0" rIns="0" bIns="0" anchor="t">
             <a:spAutoFit/>
           </a:bodyPr>
           <a:lstStyle/>
@@ -4908,7 +4968,7 @@
               </a:lnSpc>
             </a:pPr>
             <a:r>
-              <a:rPr b="0" sz="1125" i="0" u="none">
+              <a:rPr sz="1125" b="0" i="0" u="none">
                 <a:solidFill>
                   <a:srgbClr val="475569"/>
                 </a:solidFill>
@@ -4960,14 +5020,14 @@
           <a:noFill/>
         </p:spPr>
         <p:txBody>
-          <a:bodyPr wrap="square" lIns="0" rIns="0" tIns="0" bIns="0" anchor="t">
+          <a:bodyPr wrap="square" lIns="0" tIns="0" rIns="0" bIns="0" anchor="t">
             <a:spAutoFit/>
           </a:bodyPr>
           <a:lstStyle/>
           <a:p>
             <a:pPr algn="l"/>
             <a:r>
-              <a:rPr b="0" sz="1500" i="0" u="none">
+              <a:rPr sz="1500" b="0" i="0" u="none">
                 <a:solidFill>
                   <a:srgbClr val="1E293B"/>
                 </a:solidFill>
@@ -4995,7 +5055,7 @@
           <a:noFill/>
         </p:spPr>
         <p:txBody>
-          <a:bodyPr wrap="square" lIns="0" rIns="0" tIns="0" bIns="0" anchor="t">
+          <a:bodyPr wrap="square" lIns="0" tIns="0" rIns="0" bIns="0" anchor="t">
             <a:spAutoFit/>
           </a:bodyPr>
           <a:lstStyle/>
@@ -5006,7 +5066,7 @@
               </a:lnSpc>
             </a:pPr>
             <a:r>
-              <a:rPr b="0" sz="1125" i="0" u="none">
+              <a:rPr sz="1125" b="0" i="0" u="none">
                 <a:solidFill>
                   <a:srgbClr val="475569"/>
                 </a:solidFill>
@@ -5058,14 +5118,14 @@
           <a:noFill/>
         </p:spPr>
         <p:txBody>
-          <a:bodyPr wrap="square" lIns="0" rIns="0" tIns="0" bIns="0" anchor="t">
+          <a:bodyPr wrap="square" lIns="0" tIns="0" rIns="0" bIns="0" anchor="t">
             <a:spAutoFit/>
           </a:bodyPr>
           <a:lstStyle/>
           <a:p>
             <a:pPr algn="l"/>
             <a:r>
-              <a:rPr b="0" sz="1500" i="0" u="none">
+              <a:rPr sz="1500" b="0" i="0" u="none">
                 <a:solidFill>
                   <a:srgbClr val="1E293B"/>
                 </a:solidFill>
@@ -5093,7 +5153,7 @@
           <a:noFill/>
         </p:spPr>
         <p:txBody>
-          <a:bodyPr wrap="square" lIns="0" rIns="0" tIns="0" bIns="0" anchor="t">
+          <a:bodyPr wrap="square" lIns="0" tIns="0" rIns="0" bIns="0" anchor="t">
             <a:spAutoFit/>
           </a:bodyPr>
           <a:lstStyle/>
@@ -5104,7 +5164,7 @@
               </a:lnSpc>
             </a:pPr>
             <a:r>
-              <a:rPr b="0" sz="1125" i="0" u="none">
+              <a:rPr sz="1125" b="0" i="0" u="none">
                 <a:solidFill>
                   <a:srgbClr val="475569"/>
                 </a:solidFill>
@@ -5204,14 +5264,14 @@
           <a:noFill/>
         </p:spPr>
         <p:txBody>
-          <a:bodyPr wrap="square" lIns="0" rIns="0" tIns="0" bIns="0" anchor="t">
+          <a:bodyPr wrap="square" lIns="0" tIns="0" rIns="0" bIns="0" anchor="t">
             <a:spAutoFit/>
           </a:bodyPr>
           <a:lstStyle/>
           <a:p>
             <a:pPr algn="l"/>
             <a:r>
-              <a:rPr b="1" sz="2550" i="0" u="none">
+              <a:rPr sz="2550" b="1" i="0" u="none">
                 <a:solidFill>
                   <a:srgbClr val="0F172A"/>
                 </a:solidFill>
@@ -5231,7 +5291,7 @@
 </file>
 
 <file path=ppt/slides/slide14.xml><?xml version="1.0" encoding="utf-8"?>
-<p:sld xmlns:a="http://schemas.openxmlformats.org/drawingml/2006/main" xmlns:p="http://schemas.openxmlformats.org/presentationml/2006/main" xmlns:r="http://schemas.openxmlformats.org/officeDocument/2006/relationships">
+<p:sld xmlns:a="http://schemas.openxmlformats.org/drawingml/2006/main" xmlns:r="http://schemas.openxmlformats.org/officeDocument/2006/relationships" xmlns:p="http://schemas.openxmlformats.org/presentationml/2006/main">
   <p:cSld>
     <p:bg>
       <p:bgPr>
@@ -5247,7 +5307,14 @@
         <p:cNvGrpSpPr/>
         <p:nvPr/>
       </p:nvGrpSpPr>
-      <p:grpSpPr/>
+      <p:grpSpPr>
+        <a:xfrm>
+          <a:off x="0" y="0"/>
+          <a:ext cx="0" cy="0"/>
+          <a:chOff x="0" y="0"/>
+          <a:chExt cx="0" cy="0"/>
+        </a:xfrm>
+      </p:grpSpPr>
       <p:pic>
         <p:nvPicPr>
           <p:cNvPr id="2" name="Picture 1" descr="image.png"/>
@@ -5337,14 +5404,14 @@
           <a:noFill/>
         </p:spPr>
         <p:txBody>
-          <a:bodyPr wrap="square" lIns="0" rIns="0" tIns="0" bIns="0" anchor="t">
+          <a:bodyPr wrap="square" lIns="0" tIns="0" rIns="0" bIns="0" anchor="t">
             <a:spAutoFit/>
           </a:bodyPr>
           <a:lstStyle/>
           <a:p>
             <a:pPr algn="ctr"/>
             <a:r>
-              <a:rPr b="1" sz="3600" i="0" u="none">
+              <a:rPr sz="3600" b="1" i="0" u="none">
                 <a:solidFill>
                   <a:srgbClr val="FFFFFF"/>
                 </a:solidFill>
@@ -5396,6 +5463,7 @@
           <a:lstStyle/>
           <a:p>
             <a:pPr algn="ctr"/>
+            <a:endParaRPr/>
           </a:p>
         </p:txBody>
       </p:sp>
@@ -5416,7 +5484,7 @@
           <a:noFill/>
         </p:spPr>
         <p:txBody>
-          <a:bodyPr wrap="square" lIns="0" rIns="0" tIns="0" bIns="0" anchor="t">
+          <a:bodyPr wrap="square" lIns="0" tIns="0" rIns="0" bIns="0" anchor="t">
             <a:spAutoFit/>
           </a:bodyPr>
           <a:lstStyle/>
@@ -5427,7 +5495,7 @@
               </a:lnSpc>
             </a:pPr>
             <a:r>
-              <a:rPr b="0" sz="1425" i="0" u="none">
+              <a:rPr sz="1425" b="0" i="0" u="none">
                 <a:solidFill>
                   <a:srgbClr val="94A3B8"/>
                 </a:solidFill>
@@ -5447,7 +5515,7 @@
 </file>
 
 <file path=ppt/slides/slide15.xml><?xml version="1.0" encoding="utf-8"?>
-<p:sld xmlns:a="http://schemas.openxmlformats.org/drawingml/2006/main" xmlns:p="http://schemas.openxmlformats.org/presentationml/2006/main" xmlns:r="http://schemas.openxmlformats.org/officeDocument/2006/relationships">
+<p:sld xmlns:a="http://schemas.openxmlformats.org/drawingml/2006/main" xmlns:r="http://schemas.openxmlformats.org/officeDocument/2006/relationships" xmlns:p="http://schemas.openxmlformats.org/presentationml/2006/main">
   <p:cSld>
     <p:bg>
       <p:bgPr>
@@ -5463,7 +5531,14 @@
         <p:cNvGrpSpPr/>
         <p:nvPr/>
       </p:nvGrpSpPr>
-      <p:grpSpPr/>
+      <p:grpSpPr>
+        <a:xfrm>
+          <a:off x="0" y="0"/>
+          <a:ext cx="0" cy="0"/>
+          <a:chOff x="0" y="0"/>
+          <a:chExt cx="0" cy="0"/>
+        </a:xfrm>
+      </p:grpSpPr>
       <p:pic>
         <p:nvPicPr>
           <p:cNvPr id="2" name="Picture 1" descr="image.png"/>
@@ -5577,14 +5652,14 @@
           <a:noFill/>
         </p:spPr>
         <p:txBody>
-          <a:bodyPr wrap="square" lIns="0" rIns="0" tIns="0" bIns="0" anchor="t">
+          <a:bodyPr wrap="square" lIns="0" tIns="0" rIns="0" bIns="0" anchor="t">
             <a:spAutoFit/>
           </a:bodyPr>
           <a:lstStyle/>
           <a:p>
             <a:pPr algn="l"/>
             <a:r>
-              <a:rPr b="0" sz="1500" i="0" u="none">
+              <a:rPr sz="1500" b="0" i="0" u="none">
                 <a:solidFill>
                   <a:srgbClr val="2563EB"/>
                 </a:solidFill>
@@ -5612,7 +5687,7 @@
           <a:noFill/>
         </p:spPr>
         <p:txBody>
-          <a:bodyPr wrap="square" lIns="0" rIns="0" tIns="0" bIns="0" anchor="t">
+          <a:bodyPr wrap="square" lIns="0" tIns="0" rIns="0" bIns="0" anchor="t">
             <a:spAutoFit/>
           </a:bodyPr>
           <a:lstStyle/>
@@ -5623,7 +5698,7 @@
               </a:lnSpc>
             </a:pPr>
             <a:r>
-              <a:rPr b="1" sz="1125" i="0" u="none">
+              <a:rPr sz="1125" b="1" i="0" u="none">
                 <a:solidFill>
                   <a:srgbClr val="475569"/>
                 </a:solidFill>
@@ -5632,7 +5707,7 @@
               <a:t>Strategic Mapping:</a:t>
             </a:r>
             <a:r>
-              <a:rPr b="0" sz="1125" i="0" u="none">
+              <a:rPr sz="1125" b="0" i="0" u="none">
                 <a:solidFill>
                   <a:srgbClr val="475569"/>
                 </a:solidFill>
@@ -5660,7 +5735,7 @@
           <a:noFill/>
         </p:spPr>
         <p:txBody>
-          <a:bodyPr wrap="square" lIns="0" rIns="0" tIns="0" bIns="0" anchor="t">
+          <a:bodyPr wrap="square" lIns="0" tIns="0" rIns="0" bIns="0" anchor="t">
             <a:spAutoFit/>
           </a:bodyPr>
           <a:lstStyle/>
@@ -5671,7 +5746,7 @@
               </a:lnSpc>
             </a:pPr>
             <a:r>
-              <a:rPr b="1" sz="1125" i="0" u="none">
+              <a:rPr sz="1125" b="1" i="0" u="none">
                 <a:solidFill>
                   <a:srgbClr val="475569"/>
                 </a:solidFill>
@@ -5680,7 +5755,7 @@
               <a:t>Change Management:</a:t>
             </a:r>
             <a:r>
-              <a:rPr b="0" sz="1125" i="0" u="none">
+              <a:rPr sz="1125" b="0" i="0" u="none">
                 <a:solidFill>
                   <a:srgbClr val="475569"/>
                 </a:solidFill>
@@ -5708,14 +5783,14 @@
           <a:noFill/>
         </p:spPr>
         <p:txBody>
-          <a:bodyPr wrap="square" lIns="0" rIns="0" tIns="0" bIns="0" anchor="t">
+          <a:bodyPr wrap="square" lIns="0" tIns="0" rIns="0" bIns="0" anchor="t">
             <a:spAutoFit/>
           </a:bodyPr>
           <a:lstStyle/>
           <a:p>
             <a:pPr algn="l"/>
             <a:r>
-              <a:rPr b="0" sz="1500" i="0" u="none">
+              <a:rPr sz="1500" b="0" i="0" u="none">
                 <a:solidFill>
                   <a:srgbClr val="2563EB"/>
                 </a:solidFill>
@@ -5743,7 +5818,7 @@
           <a:noFill/>
         </p:spPr>
         <p:txBody>
-          <a:bodyPr wrap="square" lIns="0" rIns="0" tIns="0" bIns="0" anchor="t">
+          <a:bodyPr wrap="square" lIns="0" tIns="0" rIns="0" bIns="0" anchor="t">
             <a:spAutoFit/>
           </a:bodyPr>
           <a:lstStyle/>
@@ -5754,7 +5829,7 @@
               </a:lnSpc>
             </a:pPr>
             <a:r>
-              <a:rPr b="1" sz="1125" i="0" u="none">
+              <a:rPr sz="1125" b="1" i="0" u="none">
                 <a:solidFill>
                   <a:srgbClr val="475569"/>
                 </a:solidFill>
@@ -5763,7 +5838,7 @@
               <a:t>Multi-Metric Framework:</a:t>
             </a:r>
             <a:r>
-              <a:rPr b="0" sz="1125" i="0" u="none">
+              <a:rPr sz="1125" b="0" i="0" u="none">
                 <a:solidFill>
                   <a:srgbClr val="475569"/>
                 </a:solidFill>
@@ -5815,14 +5890,14 @@
           <a:noFill/>
         </p:spPr>
         <p:txBody>
-          <a:bodyPr wrap="square" lIns="0" rIns="0" tIns="0" bIns="0" anchor="t">
+          <a:bodyPr wrap="square" lIns="0" tIns="0" rIns="0" bIns="0" anchor="t">
             <a:spAutoFit/>
           </a:bodyPr>
           <a:lstStyle/>
           <a:p>
             <a:pPr algn="l"/>
             <a:r>
-              <a:rPr b="1" sz="2550" i="0" u="none">
+              <a:rPr sz="2550" b="1" i="0" u="none">
                 <a:solidFill>
                   <a:srgbClr val="0F172A"/>
                 </a:solidFill>
@@ -5842,7 +5917,7 @@
 </file>
 
 <file path=ppt/slides/slide16.xml><?xml version="1.0" encoding="utf-8"?>
-<p:sld xmlns:a="http://schemas.openxmlformats.org/drawingml/2006/main" xmlns:p="http://schemas.openxmlformats.org/presentationml/2006/main" xmlns:r="http://schemas.openxmlformats.org/officeDocument/2006/relationships">
+<p:sld xmlns:a="http://schemas.openxmlformats.org/drawingml/2006/main" xmlns:r="http://schemas.openxmlformats.org/officeDocument/2006/relationships" xmlns:p="http://schemas.openxmlformats.org/presentationml/2006/main">
   <p:cSld>
     <p:bg>
       <p:bgPr>
@@ -5858,7 +5933,14 @@
         <p:cNvGrpSpPr/>
         <p:nvPr/>
       </p:nvGrpSpPr>
-      <p:grpSpPr/>
+      <p:grpSpPr>
+        <a:xfrm>
+          <a:off x="0" y="0"/>
+          <a:ext cx="0" cy="0"/>
+          <a:chOff x="0" y="0"/>
+          <a:chExt cx="0" cy="0"/>
+        </a:xfrm>
+      </p:grpSpPr>
       <p:pic>
         <p:nvPicPr>
           <p:cNvPr id="2" name="Picture 1" descr="image.png"/>
@@ -5900,14 +5982,14 @@
           <a:noFill/>
         </p:spPr>
         <p:txBody>
-          <a:bodyPr wrap="square" lIns="0" rIns="0" tIns="0" bIns="0" anchor="t">
+          <a:bodyPr wrap="square" lIns="0" tIns="0" rIns="0" bIns="0" anchor="t">
             <a:spAutoFit/>
           </a:bodyPr>
           <a:lstStyle/>
           <a:p>
             <a:pPr algn="l"/>
             <a:r>
-              <a:rPr b="1" sz="2550" i="0" u="none">
+              <a:rPr sz="2550" b="1" i="0" u="none">
                 <a:solidFill>
                   <a:srgbClr val="0F172A"/>
                 </a:solidFill>
@@ -5983,14 +6065,14 @@
           <a:noFill/>
         </p:spPr>
         <p:txBody>
-          <a:bodyPr wrap="square" lIns="0" rIns="0" tIns="0" bIns="0" anchor="t">
+          <a:bodyPr wrap="square" lIns="0" tIns="0" rIns="0" bIns="0" anchor="t">
             <a:spAutoFit/>
           </a:bodyPr>
           <a:lstStyle/>
           <a:p>
             <a:pPr algn="l"/>
             <a:r>
-              <a:rPr b="0" sz="1500" i="0" u="none">
+              <a:rPr sz="1500" b="0" i="0" u="none">
                 <a:solidFill>
                   <a:srgbClr val="1E293B"/>
                 </a:solidFill>
@@ -6018,7 +6100,7 @@
           <a:noFill/>
         </p:spPr>
         <p:txBody>
-          <a:bodyPr wrap="square" lIns="0" rIns="0" tIns="0" bIns="0" anchor="t">
+          <a:bodyPr wrap="square" lIns="0" tIns="0" rIns="0" bIns="0" anchor="t">
             <a:spAutoFit/>
           </a:bodyPr>
           <a:lstStyle/>
@@ -6029,7 +6111,7 @@
               </a:lnSpc>
             </a:pPr>
             <a:r>
-              <a:rPr b="1" sz="1125" i="0" u="none">
+              <a:rPr sz="1125" b="1" i="0" u="none">
                 <a:solidFill>
                   <a:srgbClr val="475569"/>
                 </a:solidFill>
@@ -6038,7 +6120,7 @@
               <a:t>Task 1 (8 Mins):</a:t>
             </a:r>
             <a:r>
-              <a:rPr b="0" sz="1125" i="0" u="none">
+              <a:rPr sz="1125" b="0" i="0" u="none">
                 <a:solidFill>
                   <a:srgbClr val="475569"/>
                 </a:solidFill>
@@ -6066,7 +6148,7 @@
           <a:noFill/>
         </p:spPr>
         <p:txBody>
-          <a:bodyPr wrap="square" lIns="0" rIns="0" tIns="0" bIns="0" anchor="t">
+          <a:bodyPr wrap="square" lIns="0" tIns="0" rIns="0" bIns="0" anchor="t">
             <a:spAutoFit/>
           </a:bodyPr>
           <a:lstStyle/>
@@ -6077,7 +6159,7 @@
               </a:lnSpc>
             </a:pPr>
             <a:r>
-              <a:rPr b="1" sz="1125" i="0" u="none">
+              <a:rPr sz="1125" b="1" i="0" u="none">
                 <a:solidFill>
                   <a:srgbClr val="475569"/>
                 </a:solidFill>
@@ -6086,7 +6168,7 @@
               <a:t>Task 2 (7 Mins):</a:t>
             </a:r>
             <a:r>
-              <a:rPr b="0" sz="1125" i="0" u="none">
+              <a:rPr sz="1125" b="0" i="0" u="none">
                 <a:solidFill>
                   <a:srgbClr val="475569"/>
                 </a:solidFill>
@@ -6114,7 +6196,7 @@
           <a:noFill/>
         </p:spPr>
         <p:txBody>
-          <a:bodyPr wrap="square" lIns="0" rIns="0" tIns="0" bIns="0" anchor="t">
+          <a:bodyPr wrap="square" lIns="0" tIns="0" rIns="0" bIns="0" anchor="t">
             <a:spAutoFit/>
           </a:bodyPr>
           <a:lstStyle/>
@@ -6125,7 +6207,7 @@
               </a:lnSpc>
             </a:pPr>
             <a:r>
-              <a:rPr b="1" sz="1125" i="0" u="none">
+              <a:rPr sz="1125" b="1" i="0" u="none">
                 <a:solidFill>
                   <a:srgbClr val="475569"/>
                 </a:solidFill>
@@ -6134,7 +6216,7 @@
               <a:t>Task 3 (5 Mins):</a:t>
             </a:r>
             <a:r>
-              <a:rPr b="0" sz="1125" i="0" u="none">
+              <a:rPr sz="1125" b="0" i="0" u="none">
                 <a:solidFill>
                   <a:srgbClr val="475569"/>
                 </a:solidFill>
@@ -6178,7 +6260,7 @@
 </file>
 
 <file path=ppt/slides/slide17.xml><?xml version="1.0" encoding="utf-8"?>
-<p:sld xmlns:a="http://schemas.openxmlformats.org/drawingml/2006/main" xmlns:p="http://schemas.openxmlformats.org/presentationml/2006/main" xmlns:r="http://schemas.openxmlformats.org/officeDocument/2006/relationships">
+<p:sld xmlns:a="http://schemas.openxmlformats.org/drawingml/2006/main" xmlns:r="http://schemas.openxmlformats.org/officeDocument/2006/relationships" xmlns:p="http://schemas.openxmlformats.org/presentationml/2006/main">
   <p:cSld>
     <p:bg>
       <p:bgPr>
@@ -6194,7 +6276,14 @@
         <p:cNvGrpSpPr/>
         <p:nvPr/>
       </p:nvGrpSpPr>
-      <p:grpSpPr/>
+      <p:grpSpPr>
+        <a:xfrm>
+          <a:off x="0" y="0"/>
+          <a:ext cx="0" cy="0"/>
+          <a:chOff x="0" y="0"/>
+          <a:chExt cx="0" cy="0"/>
+        </a:xfrm>
+      </p:grpSpPr>
       <p:pic>
         <p:nvPicPr>
           <p:cNvPr id="2" name="Picture 1" descr="image.png"/>
@@ -6236,14 +6325,14 @@
           <a:noFill/>
         </p:spPr>
         <p:txBody>
-          <a:bodyPr wrap="square" lIns="0" rIns="0" tIns="0" bIns="0" anchor="t">
+          <a:bodyPr wrap="square" lIns="0" tIns="0" rIns="0" bIns="0" anchor="t">
             <a:spAutoFit/>
           </a:bodyPr>
           <a:lstStyle/>
           <a:p>
             <a:pPr algn="ctr"/>
             <a:r>
-              <a:rPr b="1" sz="4500" i="0" u="none">
+              <a:rPr sz="4500" b="1" i="0" u="none">
                 <a:solidFill>
                   <a:srgbClr val="0F172A"/>
                 </a:solidFill>
@@ -6271,7 +6360,7 @@
           <a:noFill/>
         </p:spPr>
         <p:txBody>
-          <a:bodyPr wrap="square" lIns="0" rIns="0" tIns="0" bIns="0" anchor="t">
+          <a:bodyPr wrap="square" lIns="0" tIns="0" rIns="0" bIns="0" anchor="t">
             <a:spAutoFit/>
           </a:bodyPr>
           <a:lstStyle/>
@@ -6282,7 +6371,7 @@
               </a:lnSpc>
             </a:pPr>
             <a:r>
-              <a:rPr b="0" sz="1650" i="0" u="none">
+              <a:rPr sz="1650" b="0" i="0" u="none">
                 <a:solidFill>
                   <a:srgbClr val="475569"/>
                 </a:solidFill>
@@ -6302,7 +6391,7 @@
         <p:spPr>
           <a:xfrm>
             <a:off x="571500" y="4052887"/>
-            <a:ext cx="11049000" cy="200025"/>
+            <a:ext cx="11049000" cy="207749"/>
           </a:xfrm>
           <a:prstGeom prst="rect">
             <a:avLst/>
@@ -6310,21 +6399,63 @@
           <a:noFill/>
         </p:spPr>
         <p:txBody>
-          <a:bodyPr wrap="square" lIns="190500" rIns="0" tIns="0" bIns="0" anchor="t">
+          <a:bodyPr wrap="square" lIns="190500" tIns="0" rIns="0" bIns="0" anchor="t">
             <a:spAutoFit/>
           </a:bodyPr>
           <a:lstStyle/>
           <a:p>
             <a:pPr algn="ctr"/>
             <a:r>
-              <a:rPr b="0" sz="1350" i="0" u="none">
+              <a:rPr sz="1350" b="0" i="0" u="none" dirty="0">
                 <a:solidFill>
                   <a:srgbClr val="2563EB"/>
                 </a:solidFill>
                 <a:latin typeface="Inter SemiBold"/>
               </a:rPr>
-              <a:t>Next: Module 2 - Digital Transformation Architecture</a:t>
-            </a:r>
+              <a:t>Next: </a:t>
+            </a:r>
+            <a:r>
+              <a:rPr lang="en-SG" sz="1350" dirty="0">
+                <a:solidFill>
+                  <a:srgbClr val="2563EB"/>
+                </a:solidFill>
+                <a:latin typeface="Inter SemiBold"/>
+              </a:rPr>
+              <a:t>LU2</a:t>
+            </a:r>
+            <a:r>
+              <a:rPr sz="1350" b="0" i="0" u="none" dirty="0">
+                <a:solidFill>
+                  <a:srgbClr val="2563EB"/>
+                </a:solidFill>
+                <a:latin typeface="Inter SemiBold"/>
+              </a:rPr>
+              <a:t> </a:t>
+            </a:r>
+            <a:r>
+              <a:rPr lang="en-SG" sz="1350" b="0" i="0" u="none" dirty="0">
+                <a:solidFill>
+                  <a:srgbClr val="2563EB"/>
+                </a:solidFill>
+                <a:latin typeface="Inter SemiBold"/>
+              </a:rPr>
+              <a:t>– Strategic Framework </a:t>
+            </a:r>
+            <a:r>
+              <a:rPr lang="en-SG" sz="1350" b="0" i="0" u="none">
+                <a:solidFill>
+                  <a:srgbClr val="2563EB"/>
+                </a:solidFill>
+                <a:latin typeface="Inter SemiBold"/>
+              </a:rPr>
+              <a:t>for Digital Age</a:t>
+            </a:r>
+            <a:endParaRPr sz="1350" b="0" i="0" u="none" dirty="0">
+              <a:solidFill>
+                <a:srgbClr val="2563EB"/>
+              </a:solidFill>
+              <a:latin typeface="Inter SemiBold"/>
+            </a:endParaRPr>
           </a:p>
         </p:txBody>
       </p:sp>
@@ -6361,7 +6492,7 @@
 </file>
 
 <file path=ppt/slides/slide18.xml><?xml version="1.0" encoding="utf-8"?>
-<p:sld xmlns:a="http://schemas.openxmlformats.org/drawingml/2006/main" xmlns:p="http://schemas.openxmlformats.org/presentationml/2006/main" xmlns:r="http://schemas.openxmlformats.org/officeDocument/2006/relationships">
+<p:sld xmlns:a="http://schemas.openxmlformats.org/drawingml/2006/main" xmlns:r="http://schemas.openxmlformats.org/officeDocument/2006/relationships" xmlns:p="http://schemas.openxmlformats.org/presentationml/2006/main">
   <p:cSld>
     <p:bg>
       <p:bgPr>
@@ -6377,7 +6508,14 @@
         <p:cNvGrpSpPr/>
         <p:nvPr/>
       </p:nvGrpSpPr>
-      <p:grpSpPr/>
+      <p:grpSpPr>
+        <a:xfrm>
+          <a:off x="0" y="0"/>
+          <a:ext cx="0" cy="0"/>
+          <a:chOff x="0" y="0"/>
+          <a:chExt cx="0" cy="0"/>
+        </a:xfrm>
+      </p:grpSpPr>
       <p:pic>
         <p:nvPicPr>
           <p:cNvPr id="2" name="Picture 1" descr="image.png"/>
@@ -6441,6 +6579,7 @@
           <a:lstStyle/>
           <a:p>
             <a:pPr algn="ctr"/>
+            <a:endParaRPr/>
           </a:p>
         </p:txBody>
       </p:sp>
@@ -6485,6 +6624,7 @@
           <a:lstStyle/>
           <a:p>
             <a:pPr algn="ctr"/>
+            <a:endParaRPr/>
           </a:p>
         </p:txBody>
       </p:sp>
@@ -6529,6 +6669,7 @@
           <a:lstStyle/>
           <a:p>
             <a:pPr algn="ctr"/>
+            <a:endParaRPr/>
           </a:p>
         </p:txBody>
       </p:sp>
@@ -6573,7 +6714,7 @@
           <a:noFill/>
         </p:spPr>
         <p:txBody>
-          <a:bodyPr wrap="square" lIns="0" rIns="0" tIns="0" bIns="0" anchor="t">
+          <a:bodyPr wrap="square" lIns="0" tIns="0" rIns="0" bIns="0" anchor="t">
             <a:spAutoFit/>
           </a:bodyPr>
           <a:lstStyle/>
@@ -6584,7 +6725,7 @@
               </a:lnSpc>
             </a:pPr>
             <a:r>
-              <a:rPr b="0" sz="975" i="0" u="none">
+              <a:rPr sz="975" b="0" i="0" u="none">
                 <a:solidFill>
                   <a:srgbClr val="475569"/>
                 </a:solidFill>
@@ -6612,7 +6753,7 @@
           <a:noFill/>
         </p:spPr>
         <p:txBody>
-          <a:bodyPr wrap="square" lIns="0" rIns="0" tIns="0" bIns="0" anchor="t">
+          <a:bodyPr wrap="square" lIns="0" tIns="0" rIns="0" bIns="0" anchor="t">
             <a:spAutoFit/>
           </a:bodyPr>
           <a:lstStyle/>
@@ -6623,7 +6764,7 @@
               </a:lnSpc>
             </a:pPr>
             <a:r>
-              <a:rPr b="0" sz="1200" i="0" u="none">
+              <a:rPr sz="1200" b="0" i="0" u="none">
                 <a:solidFill>
                   <a:srgbClr val="475569"/>
                 </a:solidFill>
@@ -6632,7 +6773,7 @@
               <a:t>Source: </a:t>
             </a:r>
             <a:r>
-              <a:rPr b="0" sz="1200" i="0" u="none">
+              <a:rPr sz="1200" b="0" i="0" u="none">
                 <a:solidFill>
                   <a:srgbClr val="4F46E5"/>
                 </a:solidFill>
@@ -6684,7 +6825,7 @@
           <a:noFill/>
         </p:spPr>
         <p:txBody>
-          <a:bodyPr wrap="square" lIns="0" rIns="0" tIns="0" bIns="0" anchor="t">
+          <a:bodyPr wrap="square" lIns="0" tIns="0" rIns="0" bIns="0" anchor="t">
             <a:spAutoFit/>
           </a:bodyPr>
           <a:lstStyle/>
@@ -6695,7 +6836,7 @@
               </a:lnSpc>
             </a:pPr>
             <a:r>
-              <a:rPr b="0" sz="975" i="0" u="none">
+              <a:rPr sz="975" b="0" i="0" u="none">
                 <a:solidFill>
                   <a:srgbClr val="475569"/>
                 </a:solidFill>
@@ -6723,7 +6864,7 @@
           <a:noFill/>
         </p:spPr>
         <p:txBody>
-          <a:bodyPr wrap="square" lIns="0" rIns="0" tIns="0" bIns="0" anchor="t">
+          <a:bodyPr wrap="square" lIns="0" tIns="0" rIns="0" bIns="0" anchor="t">
             <a:spAutoFit/>
           </a:bodyPr>
           <a:lstStyle/>
@@ -6734,7 +6875,7 @@
               </a:lnSpc>
             </a:pPr>
             <a:r>
-              <a:rPr b="0" sz="1200" i="0" u="none">
+              <a:rPr sz="1200" b="0" i="0" u="none">
                 <a:solidFill>
                   <a:srgbClr val="475569"/>
                 </a:solidFill>
@@ -6743,7 +6884,7 @@
               <a:t>Source: </a:t>
             </a:r>
             <a:r>
-              <a:rPr b="0" sz="1200" i="0" u="none">
+              <a:rPr sz="1200" b="0" i="0" u="none">
                 <a:solidFill>
                   <a:srgbClr val="4F46E5"/>
                 </a:solidFill>
@@ -6771,14 +6912,14 @@
           <a:noFill/>
         </p:spPr>
         <p:txBody>
-          <a:bodyPr wrap="square" lIns="0" rIns="0" tIns="0" bIns="0" anchor="t">
+          <a:bodyPr wrap="square" lIns="0" tIns="0" rIns="0" bIns="0" anchor="t">
             <a:spAutoFit/>
           </a:bodyPr>
           <a:lstStyle/>
           <a:p>
             <a:pPr algn="l"/>
             <a:r>
-              <a:rPr b="1" sz="2550" i="0" u="none">
+              <a:rPr sz="2550" b="1" i="0" u="none">
                 <a:solidFill>
                   <a:srgbClr val="0F172A"/>
                 </a:solidFill>
@@ -6798,7 +6939,7 @@
 </file>
 
 <file path=ppt/slides/slide2.xml><?xml version="1.0" encoding="utf-8"?>
-<p:sld xmlns:a="http://schemas.openxmlformats.org/drawingml/2006/main" xmlns:p="http://schemas.openxmlformats.org/presentationml/2006/main" xmlns:r="http://schemas.openxmlformats.org/officeDocument/2006/relationships">
+<p:sld xmlns:a="http://schemas.openxmlformats.org/drawingml/2006/main" xmlns:r="http://schemas.openxmlformats.org/officeDocument/2006/relationships" xmlns:p="http://schemas.openxmlformats.org/presentationml/2006/main">
   <p:cSld>
     <p:bg>
       <p:bgPr>
@@ -6814,7 +6955,14 @@
         <p:cNvGrpSpPr/>
         <p:nvPr/>
       </p:nvGrpSpPr>
-      <p:grpSpPr/>
+      <p:grpSpPr>
+        <a:xfrm>
+          <a:off x="0" y="0"/>
+          <a:ext cx="0" cy="0"/>
+          <a:chOff x="0" y="0"/>
+          <a:chExt cx="0" cy="0"/>
+        </a:xfrm>
+      </p:grpSpPr>
       <p:pic>
         <p:nvPicPr>
           <p:cNvPr id="2" name="Picture 1" descr="image.png"/>
@@ -6856,29 +7004,29 @@
             <a:tbl>
               <a:tblPr firstRow="1" bandRow="1">
                 <a:tableStyleId>{5C22544A-7EE6-4342-B048-85BDC9FD1C3A}</a:tableStyleId>
-                <a:lnL>
-                  <a:noFill/>
-                </a:lnL>
-                <a:lnR>
-                  <a:noFill/>
-                </a:lnR>
-                <a:lnT>
-                  <a:noFill/>
-                </a:lnT>
-                <a:lnB>
-                  <a:noFill/>
-                </a:lnB>
-                <a:lnV>
-                  <a:noFill/>
-                </a:lnV>
-                <a:lnH>
-                  <a:noFill/>
-                </a:lnH>
               </a:tblPr>
               <a:tblGrid>
-                <a:gridCol w="1980307"/>
-                <a:gridCol w="4098726"/>
-                <a:gridCol w="4950916"/>
+                <a:gridCol w="1980307">
+                  <a:extLst>
+                    <a:ext uri="{9D8B030D-6E8A-4147-A177-3AD203B41FA5}">
+                      <a16:colId xmlns:a16="http://schemas.microsoft.com/office/drawing/2014/main" val="20000"/>
+                    </a:ext>
+                  </a:extLst>
+                </a:gridCol>
+                <a:gridCol w="4098726">
+                  <a:extLst>
+                    <a:ext uri="{9D8B030D-6E8A-4147-A177-3AD203B41FA5}">
+                      <a16:colId xmlns:a16="http://schemas.microsoft.com/office/drawing/2014/main" val="20001"/>
+                    </a:ext>
+                  </a:extLst>
+                </a:gridCol>
+                <a:gridCol w="4950916">
+                  <a:extLst>
+                    <a:ext uri="{9D8B030D-6E8A-4147-A177-3AD203B41FA5}">
+                      <a16:colId xmlns:a16="http://schemas.microsoft.com/office/drawing/2014/main" val="20002"/>
+                    </a:ext>
+                  </a:extLst>
+                </a:gridCol>
               </a:tblGrid>
               <a:tr h="478035">
                 <a:tc>
@@ -6888,7 +7036,7 @@
                     <a:p>
                       <a:pPr algn="l"/>
                       <a:r>
-                        <a:rPr b="0" sz="1125" i="0" u="none">
+                        <a:rPr sz="1125" b="0" i="0" u="none">
                           <a:solidFill>
                             <a:srgbClr val="FFFFFF"/>
                           </a:solidFill>
@@ -6898,7 +7046,7 @@
                       </a:r>
                     </a:p>
                   </a:txBody>
-                  <a:tcPr anchor="ctr" marL="63500" marR="63500" marT="25400" marB="25400">
+                  <a:tcPr marL="63500" marR="63500" marT="25400" marB="25400" anchor="ctr">
                     <a:lnL>
                       <a:noFill/>
                     </a:lnL>
@@ -6923,7 +7071,7 @@
                     <a:p>
                       <a:pPr algn="l"/>
                       <a:r>
-                        <a:rPr b="0" sz="1125" i="0" u="none">
+                        <a:rPr sz="1125" b="0" i="0" u="none">
                           <a:solidFill>
                             <a:srgbClr val="FFFFFF"/>
                           </a:solidFill>
@@ -6933,7 +7081,7 @@
                       </a:r>
                     </a:p>
                   </a:txBody>
-                  <a:tcPr anchor="ctr" marL="63500" marR="63500" marT="25400" marB="25400">
+                  <a:tcPr marL="63500" marR="63500" marT="25400" marB="25400" anchor="ctr">
                     <a:lnL>
                       <a:noFill/>
                     </a:lnL>
@@ -6958,7 +7106,7 @@
                     <a:p>
                       <a:pPr algn="l"/>
                       <a:r>
-                        <a:rPr b="0" sz="1125" i="0" u="none">
+                        <a:rPr sz="1125" b="0" i="0" u="none">
                           <a:solidFill>
                             <a:srgbClr val="FFFFFF"/>
                           </a:solidFill>
@@ -6968,7 +7116,7 @@
                       </a:r>
                     </a:p>
                   </a:txBody>
-                  <a:tcPr anchor="ctr" marL="63500" marR="63500" marT="25400" marB="25400">
+                  <a:tcPr marL="63500" marR="63500" marT="25400" marB="25400" anchor="ctr">
                     <a:lnL>
                       <a:noFill/>
                     </a:lnL>
@@ -6986,6 +7134,11 @@
                     </a:solidFill>
                   </a:tcPr>
                 </a:tc>
+                <a:extLst>
+                  <a:ext uri="{0D108BD9-81ED-4DB2-BD59-A6C34878D82A}">
+                    <a16:rowId xmlns:a16="http://schemas.microsoft.com/office/drawing/2014/main" val="10000"/>
+                  </a:ext>
+                </a:extLst>
               </a:tr>
               <a:tr h="478035">
                 <a:tc>
@@ -6995,7 +7148,7 @@
                     <a:p>
                       <a:pPr algn="l"/>
                       <a:r>
-                        <a:rPr b="1" sz="1050" i="0" u="none">
+                        <a:rPr sz="1050" b="1" i="0" u="none">
                           <a:solidFill>
                             <a:srgbClr val="475569"/>
                           </a:solidFill>
@@ -7005,7 +7158,7 @@
                       </a:r>
                     </a:p>
                   </a:txBody>
-                  <a:tcPr anchor="ctr" marL="63500" marR="63500" marT="25400" marB="25400">
+                  <a:tcPr marL="63500" marR="63500" marT="25400" marB="25400" anchor="ctr">
                     <a:lnL>
                       <a:noFill/>
                     </a:lnL>
@@ -7030,7 +7183,7 @@
                     <a:p>
                       <a:pPr algn="l"/>
                       <a:r>
-                        <a:rPr b="0" sz="1050" i="0" u="none">
+                        <a:rPr sz="1050" b="0" i="0" u="none">
                           <a:solidFill>
                             <a:srgbClr val="475569"/>
                           </a:solidFill>
@@ -7040,7 +7193,7 @@
                       </a:r>
                     </a:p>
                   </a:txBody>
-                  <a:tcPr anchor="ctr" marL="63500" marR="63500" marT="25400" marB="25400">
+                  <a:tcPr marL="63500" marR="63500" marT="25400" marB="25400" anchor="ctr">
                     <a:lnL>
                       <a:noFill/>
                     </a:lnL>
@@ -7065,7 +7218,7 @@
                     <a:p>
                       <a:pPr algn="l"/>
                       <a:r>
-                        <a:rPr b="0" sz="1050" i="0" u="none">
+                        <a:rPr sz="1050" b="0" i="0" u="none">
                           <a:solidFill>
                             <a:srgbClr val="475569"/>
                           </a:solidFill>
@@ -7075,7 +7228,7 @@
                       </a:r>
                     </a:p>
                   </a:txBody>
-                  <a:tcPr anchor="ctr" marL="63500" marR="63500" marT="25400" marB="25400">
+                  <a:tcPr marL="63500" marR="63500" marT="25400" marB="25400" anchor="ctr">
                     <a:lnL>
                       <a:noFill/>
                     </a:lnL>
@@ -7093,6 +7246,11 @@
                     </a:solidFill>
                   </a:tcPr>
                 </a:tc>
+                <a:extLst>
+                  <a:ext uri="{0D108BD9-81ED-4DB2-BD59-A6C34878D82A}">
+                    <a16:rowId xmlns:a16="http://schemas.microsoft.com/office/drawing/2014/main" val="10001"/>
+                  </a:ext>
+                </a:extLst>
               </a:tr>
               <a:tr h="478035">
                 <a:tc>
@@ -7102,7 +7260,7 @@
                     <a:p>
                       <a:pPr algn="l"/>
                       <a:r>
-                        <a:rPr b="1" sz="1050" i="0" u="none">
+                        <a:rPr sz="1050" b="1" i="0" u="none">
                           <a:solidFill>
                             <a:srgbClr val="475569"/>
                           </a:solidFill>
@@ -7112,7 +7270,7 @@
                       </a:r>
                     </a:p>
                   </a:txBody>
-                  <a:tcPr anchor="ctr" marL="63500" marR="63500" marT="25400" marB="25400">
+                  <a:tcPr marL="63500" marR="63500" marT="25400" marB="25400" anchor="ctr">
                     <a:lnL>
                       <a:noFill/>
                     </a:lnL>
@@ -7137,7 +7295,7 @@
                     <a:p>
                       <a:pPr algn="l"/>
                       <a:r>
-                        <a:rPr b="1" sz="1050" i="0" u="none">
+                        <a:rPr sz="1050" b="1" i="0" u="none">
                           <a:solidFill>
                             <a:srgbClr val="475569"/>
                           </a:solidFill>
@@ -7146,7 +7304,7 @@
                         <a:t>LO1:</a:t>
                       </a:r>
                       <a:r>
-                        <a:rPr b="0" sz="1050" i="0" u="none">
+                        <a:rPr sz="1050" b="0" i="0" u="none">
                           <a:solidFill>
                             <a:srgbClr val="475569"/>
                           </a:solidFill>
@@ -7156,7 +7314,7 @@
                       </a:r>
                     </a:p>
                   </a:txBody>
-                  <a:tcPr anchor="ctr" marL="63500" marR="63500" marT="25400" marB="25400">
+                  <a:tcPr marL="63500" marR="63500" marT="25400" marB="25400" anchor="ctr">
                     <a:lnL>
                       <a:noFill/>
                     </a:lnL>
@@ -7181,7 +7339,7 @@
                     <a:p>
                       <a:pPr algn="l"/>
                       <a:r>
-                        <a:rPr b="0" sz="1050" i="0" u="none">
+                        <a:rPr sz="1050" b="0" i="0" u="none">
                           <a:solidFill>
                             <a:srgbClr val="475569"/>
                           </a:solidFill>
@@ -7191,7 +7349,7 @@
                       </a:r>
                     </a:p>
                   </a:txBody>
-                  <a:tcPr anchor="ctr" marL="63500" marR="63500" marT="25400" marB="25400">
+                  <a:tcPr marL="63500" marR="63500" marT="25400" marB="25400" anchor="ctr">
                     <a:lnL>
                       <a:noFill/>
                     </a:lnL>
@@ -7209,6 +7367,11 @@
                     </a:solidFill>
                   </a:tcPr>
                 </a:tc>
+                <a:extLst>
+                  <a:ext uri="{0D108BD9-81ED-4DB2-BD59-A6C34878D82A}">
+                    <a16:rowId xmlns:a16="http://schemas.microsoft.com/office/drawing/2014/main" val="10002"/>
+                  </a:ext>
+                </a:extLst>
               </a:tr>
               <a:tr h="478035">
                 <a:tc>
@@ -7218,7 +7381,7 @@
                     <a:p>
                       <a:pPr algn="l"/>
                       <a:r>
-                        <a:rPr b="1" sz="1050" i="0" u="none">
+                        <a:rPr sz="1050" b="1" i="0" u="none">
                           <a:solidFill>
                             <a:srgbClr val="475569"/>
                           </a:solidFill>
@@ -7228,7 +7391,7 @@
                       </a:r>
                     </a:p>
                   </a:txBody>
-                  <a:tcPr anchor="ctr" marL="63500" marR="63500" marT="25400" marB="25400">
+                  <a:tcPr marL="63500" marR="63500" marT="25400" marB="25400" anchor="ctr">
                     <a:lnL>
                       <a:noFill/>
                     </a:lnL>
@@ -7253,7 +7416,7 @@
                     <a:p>
                       <a:pPr algn="l"/>
                       <a:r>
-                        <a:rPr b="1" sz="1050" i="0" u="none">
+                        <a:rPr sz="1050" b="1" i="0" u="none">
                           <a:solidFill>
                             <a:srgbClr val="475569"/>
                           </a:solidFill>
@@ -7262,7 +7425,7 @@
                         <a:t>LO2:</a:t>
                       </a:r>
                       <a:r>
-                        <a:rPr b="0" sz="1050" i="0" u="none">
+                        <a:rPr sz="1050" b="0" i="0" u="none">
                           <a:solidFill>
                             <a:srgbClr val="475569"/>
                           </a:solidFill>
@@ -7272,7 +7435,7 @@
                       </a:r>
                     </a:p>
                   </a:txBody>
-                  <a:tcPr anchor="ctr" marL="63500" marR="63500" marT="25400" marB="25400">
+                  <a:tcPr marL="63500" marR="63500" marT="25400" marB="25400" anchor="ctr">
                     <a:lnL>
                       <a:noFill/>
                     </a:lnL>
@@ -7297,7 +7460,7 @@
                     <a:p>
                       <a:pPr algn="l"/>
                       <a:r>
-                        <a:rPr b="0" sz="1050" i="0" u="none">
+                        <a:rPr sz="1050" b="0" i="0" u="none">
                           <a:solidFill>
                             <a:srgbClr val="475569"/>
                           </a:solidFill>
@@ -7307,7 +7470,7 @@
                       </a:r>
                     </a:p>
                   </a:txBody>
-                  <a:tcPr anchor="ctr" marL="63500" marR="63500" marT="25400" marB="25400">
+                  <a:tcPr marL="63500" marR="63500" marT="25400" marB="25400" anchor="ctr">
                     <a:lnL>
                       <a:noFill/>
                     </a:lnL>
@@ -7325,6 +7488,11 @@
                     </a:solidFill>
                   </a:tcPr>
                 </a:tc>
+                <a:extLst>
+                  <a:ext uri="{0D108BD9-81ED-4DB2-BD59-A6C34878D82A}">
+                    <a16:rowId xmlns:a16="http://schemas.microsoft.com/office/drawing/2014/main" val="10003"/>
+                  </a:ext>
+                </a:extLst>
               </a:tr>
               <a:tr h="478035">
                 <a:tc>
@@ -7334,7 +7502,7 @@
                     <a:p>
                       <a:pPr algn="l"/>
                       <a:r>
-                        <a:rPr b="1" sz="1050" i="0" u="none">
+                        <a:rPr sz="1050" b="1" i="0" u="none">
                           <a:solidFill>
                             <a:srgbClr val="475569"/>
                           </a:solidFill>
@@ -7344,7 +7512,7 @@
                       </a:r>
                     </a:p>
                   </a:txBody>
-                  <a:tcPr anchor="ctr" marL="63500" marR="63500" marT="25400" marB="25400">
+                  <a:tcPr marL="63500" marR="63500" marT="25400" marB="25400" anchor="ctr">
                     <a:lnL>
                       <a:noFill/>
                     </a:lnL>
@@ -7369,7 +7537,7 @@
                     <a:p>
                       <a:pPr algn="l"/>
                       <a:r>
-                        <a:rPr b="1" sz="1050" i="0" u="none">
+                        <a:rPr sz="1050" b="1" i="0" u="none">
                           <a:solidFill>
                             <a:srgbClr val="D97706"/>
                           </a:solidFill>
@@ -7379,7 +7547,7 @@
                       </a:r>
                     </a:p>
                   </a:txBody>
-                  <a:tcPr anchor="ctr" marL="247650" marR="63500" marT="25400" marB="25400">
+                  <a:tcPr marL="247650" marR="63500" marT="25400" marB="25400" anchor="ctr">
                     <a:lnL>
                       <a:noFill/>
                     </a:lnL>
@@ -7404,7 +7572,7 @@
                     <a:p>
                       <a:pPr algn="l"/>
                       <a:r>
-                        <a:rPr b="0" sz="1050" i="0" u="none">
+                        <a:rPr sz="1050" b="0" i="0" u="none">
                           <a:solidFill>
                             <a:srgbClr val="475569"/>
                           </a:solidFill>
@@ -7414,7 +7582,7 @@
                       </a:r>
                     </a:p>
                   </a:txBody>
-                  <a:tcPr anchor="ctr" marL="63500" marR="63500" marT="25400" marB="25400">
+                  <a:tcPr marL="63500" marR="63500" marT="25400" marB="25400" anchor="ctr">
                     <a:lnL>
                       <a:noFill/>
                     </a:lnL>
@@ -7432,6 +7600,11 @@
                     </a:solidFill>
                   </a:tcPr>
                 </a:tc>
+                <a:extLst>
+                  <a:ext uri="{0D108BD9-81ED-4DB2-BD59-A6C34878D82A}">
+                    <a16:rowId xmlns:a16="http://schemas.microsoft.com/office/drawing/2014/main" val="10004"/>
+                  </a:ext>
+                </a:extLst>
               </a:tr>
               <a:tr h="478035">
                 <a:tc>
@@ -7441,7 +7614,7 @@
                     <a:p>
                       <a:pPr algn="l"/>
                       <a:r>
-                        <a:rPr b="1" sz="1050" i="0" u="none">
+                        <a:rPr sz="1050" b="1" i="0" u="none">
                           <a:solidFill>
                             <a:srgbClr val="475569"/>
                           </a:solidFill>
@@ -7451,7 +7624,7 @@
                       </a:r>
                     </a:p>
                   </a:txBody>
-                  <a:tcPr anchor="ctr" marL="63500" marR="63500" marT="25400" marB="25400">
+                  <a:tcPr marL="63500" marR="63500" marT="25400" marB="25400" anchor="ctr">
                     <a:lnL>
                       <a:noFill/>
                     </a:lnL>
@@ -7476,7 +7649,7 @@
                     <a:p>
                       <a:pPr algn="l"/>
                       <a:r>
-                        <a:rPr b="1" sz="1050" i="0" u="none">
+                        <a:rPr sz="1050" b="1" i="0" u="none">
                           <a:solidFill>
                             <a:srgbClr val="475569"/>
                           </a:solidFill>
@@ -7485,7 +7658,7 @@
                         <a:t>LO3:</a:t>
                       </a:r>
                       <a:r>
-                        <a:rPr b="0" sz="1050" i="0" u="none">
+                        <a:rPr sz="1050" b="0" i="0" u="none">
                           <a:solidFill>
                             <a:srgbClr val="475569"/>
                           </a:solidFill>
@@ -7495,7 +7668,7 @@
                       </a:r>
                     </a:p>
                   </a:txBody>
-                  <a:tcPr anchor="ctr" marL="63500" marR="63500" marT="25400" marB="25400">
+                  <a:tcPr marL="63500" marR="63500" marT="25400" marB="25400" anchor="ctr">
                     <a:lnL>
                       <a:noFill/>
                     </a:lnL>
@@ -7520,7 +7693,7 @@
                     <a:p>
                       <a:pPr algn="l"/>
                       <a:r>
-                        <a:rPr b="0" sz="1050" i="0" u="none">
+                        <a:rPr sz="1050" b="0" i="0" u="none">
                           <a:solidFill>
                             <a:srgbClr val="475569"/>
                           </a:solidFill>
@@ -7530,7 +7703,7 @@
                       </a:r>
                     </a:p>
                   </a:txBody>
-                  <a:tcPr anchor="ctr" marL="63500" marR="63500" marT="25400" marB="25400">
+                  <a:tcPr marL="63500" marR="63500" marT="25400" marB="25400" anchor="ctr">
                     <a:lnL>
                       <a:noFill/>
                     </a:lnL>
@@ -7548,6 +7721,11 @@
                     </a:solidFill>
                   </a:tcPr>
                 </a:tc>
+                <a:extLst>
+                  <a:ext uri="{0D108BD9-81ED-4DB2-BD59-A6C34878D82A}">
+                    <a16:rowId xmlns:a16="http://schemas.microsoft.com/office/drawing/2014/main" val="10005"/>
+                  </a:ext>
+                </a:extLst>
               </a:tr>
               <a:tr h="478035">
                 <a:tc>
@@ -7557,7 +7735,7 @@
                     <a:p>
                       <a:pPr algn="l"/>
                       <a:r>
-                        <a:rPr b="1" sz="1050" i="0" u="none">
+                        <a:rPr sz="1050" b="1" i="0" u="none">
                           <a:solidFill>
                             <a:srgbClr val="475569"/>
                           </a:solidFill>
@@ -7567,7 +7745,7 @@
                       </a:r>
                     </a:p>
                   </a:txBody>
-                  <a:tcPr anchor="ctr" marL="63500" marR="63500" marT="25400" marB="25400">
+                  <a:tcPr marL="63500" marR="63500" marT="25400" marB="25400" anchor="ctr">
                     <a:lnL>
                       <a:noFill/>
                     </a:lnL>
@@ -7592,7 +7770,7 @@
                     <a:p>
                       <a:pPr algn="l"/>
                       <a:r>
-                        <a:rPr b="1" sz="1050" i="0" u="none">
+                        <a:rPr sz="1050" b="1" i="0" u="none">
                           <a:solidFill>
                             <a:srgbClr val="475569"/>
                           </a:solidFill>
@@ -7601,7 +7779,7 @@
                         <a:t>LO4:</a:t>
                       </a:r>
                       <a:r>
-                        <a:rPr b="0" sz="1050" i="0" u="none">
+                        <a:rPr sz="1050" b="0" i="0" u="none">
                           <a:solidFill>
                             <a:srgbClr val="475569"/>
                           </a:solidFill>
@@ -7611,7 +7789,7 @@
                       </a:r>
                     </a:p>
                   </a:txBody>
-                  <a:tcPr anchor="ctr" marL="63500" marR="63500" marT="25400" marB="25400">
+                  <a:tcPr marL="63500" marR="63500" marT="25400" marB="25400" anchor="ctr">
                     <a:lnL>
                       <a:noFill/>
                     </a:lnL>
@@ -7636,7 +7814,7 @@
                     <a:p>
                       <a:pPr algn="l"/>
                       <a:r>
-                        <a:rPr b="0" sz="1050" i="0" u="none">
+                        <a:rPr sz="1050" b="0" i="0" u="none">
                           <a:solidFill>
                             <a:srgbClr val="475569"/>
                           </a:solidFill>
@@ -7646,7 +7824,7 @@
                       </a:r>
                     </a:p>
                   </a:txBody>
-                  <a:tcPr anchor="ctr" marL="63500" marR="63500" marT="25400" marB="25400">
+                  <a:tcPr marL="63500" marR="63500" marT="25400" marB="25400" anchor="ctr">
                     <a:lnL>
                       <a:noFill/>
                     </a:lnL>
@@ -7664,6 +7842,11 @@
                     </a:solidFill>
                   </a:tcPr>
                 </a:tc>
+                <a:extLst>
+                  <a:ext uri="{0D108BD9-81ED-4DB2-BD59-A6C34878D82A}">
+                    <a16:rowId xmlns:a16="http://schemas.microsoft.com/office/drawing/2014/main" val="10006"/>
+                  </a:ext>
+                </a:extLst>
               </a:tr>
               <a:tr h="478042">
                 <a:tc>
@@ -7673,7 +7856,7 @@
                     <a:p>
                       <a:pPr algn="l"/>
                       <a:r>
-                        <a:rPr b="1" sz="1050" i="0" u="none">
+                        <a:rPr sz="1050" b="1" i="0" u="none">
                           <a:solidFill>
                             <a:srgbClr val="475569"/>
                           </a:solidFill>
@@ -7683,7 +7866,7 @@
                       </a:r>
                     </a:p>
                   </a:txBody>
-                  <a:tcPr anchor="ctr" marL="63500" marR="63500" marT="25400" marB="25400">
+                  <a:tcPr marL="63500" marR="63500" marT="25400" marB="25400" anchor="ctr">
                     <a:lnL>
                       <a:noFill/>
                     </a:lnL>
@@ -7708,7 +7891,7 @@
                     <a:p>
                       <a:pPr algn="l"/>
                       <a:r>
-                        <a:rPr b="0" sz="1050" i="0" u="none">
+                        <a:rPr sz="1050" b="0" i="0" u="none">
                           <a:solidFill>
                             <a:srgbClr val="475569"/>
                           </a:solidFill>
@@ -7718,7 +7901,7 @@
                       </a:r>
                     </a:p>
                   </a:txBody>
-                  <a:tcPr anchor="ctr" marL="63500" marR="63500" marT="25400" marB="25400">
+                  <a:tcPr marL="63500" marR="63500" marT="25400" marB="25400" anchor="ctr">
                     <a:lnL>
                       <a:noFill/>
                     </a:lnL>
@@ -7743,7 +7926,7 @@
                     <a:p>
                       <a:pPr algn="l"/>
                       <a:r>
-                        <a:rPr b="0" sz="1050" i="0" u="none">
+                        <a:rPr sz="1050" b="0" i="0" u="none">
                           <a:solidFill>
                             <a:srgbClr val="475569"/>
                           </a:solidFill>
@@ -7753,7 +7936,7 @@
                       </a:r>
                     </a:p>
                   </a:txBody>
-                  <a:tcPr anchor="ctr" marL="63500" marR="63500" marT="25400" marB="25400">
+                  <a:tcPr marL="63500" marR="63500" marT="25400" marB="25400" anchor="ctr">
                     <a:lnL>
                       <a:noFill/>
                     </a:lnL>
@@ -7771,6 +7954,11 @@
                     </a:solidFill>
                   </a:tcPr>
                 </a:tc>
+                <a:extLst>
+                  <a:ext uri="{0D108BD9-81ED-4DB2-BD59-A6C34878D82A}">
+                    <a16:rowId xmlns:a16="http://schemas.microsoft.com/office/drawing/2014/main" val="10007"/>
+                  </a:ext>
+                </a:extLst>
               </a:tr>
             </a:tbl>
           </a:graphicData>
@@ -7817,6 +8005,7 @@
           <a:lstStyle/>
           <a:p>
             <a:pPr algn="ctr"/>
+            <a:endParaRPr/>
           </a:p>
         </p:txBody>
       </p:sp>
@@ -7861,6 +8050,7 @@
           <a:lstStyle/>
           <a:p>
             <a:pPr algn="ctr"/>
+            <a:endParaRPr/>
           </a:p>
         </p:txBody>
       </p:sp>
@@ -7905,6 +8095,7 @@
           <a:lstStyle/>
           <a:p>
             <a:pPr algn="ctr"/>
+            <a:endParaRPr/>
           </a:p>
         </p:txBody>
       </p:sp>
@@ -7949,6 +8140,7 @@
           <a:lstStyle/>
           <a:p>
             <a:pPr algn="ctr"/>
+            <a:endParaRPr/>
           </a:p>
         </p:txBody>
       </p:sp>
@@ -7993,6 +8185,7 @@
           <a:lstStyle/>
           <a:p>
             <a:pPr algn="ctr"/>
+            <a:endParaRPr/>
           </a:p>
         </p:txBody>
       </p:sp>
@@ -8037,6 +8230,7 @@
           <a:lstStyle/>
           <a:p>
             <a:pPr algn="ctr"/>
+            <a:endParaRPr/>
           </a:p>
         </p:txBody>
       </p:sp>
@@ -8081,6 +8275,7 @@
           <a:lstStyle/>
           <a:p>
             <a:pPr algn="ctr"/>
+            <a:endParaRPr/>
           </a:p>
         </p:txBody>
       </p:sp>
@@ -8125,6 +8320,7 @@
           <a:lstStyle/>
           <a:p>
             <a:pPr algn="ctr"/>
+            <a:endParaRPr/>
           </a:p>
         </p:txBody>
       </p:sp>
@@ -8169,6 +8365,7 @@
           <a:lstStyle/>
           <a:p>
             <a:pPr algn="ctr"/>
+            <a:endParaRPr/>
           </a:p>
         </p:txBody>
       </p:sp>
@@ -8213,6 +8410,7 @@
           <a:lstStyle/>
           <a:p>
             <a:pPr algn="ctr"/>
+            <a:endParaRPr/>
           </a:p>
         </p:txBody>
       </p:sp>
@@ -8257,6 +8455,7 @@
           <a:lstStyle/>
           <a:p>
             <a:pPr algn="ctr"/>
+            <a:endParaRPr/>
           </a:p>
         </p:txBody>
       </p:sp>
@@ -8301,6 +8500,7 @@
           <a:lstStyle/>
           <a:p>
             <a:pPr algn="ctr"/>
+            <a:endParaRPr/>
           </a:p>
         </p:txBody>
       </p:sp>
@@ -8345,6 +8545,7 @@
           <a:lstStyle/>
           <a:p>
             <a:pPr algn="ctr"/>
+            <a:endParaRPr/>
           </a:p>
         </p:txBody>
       </p:sp>
@@ -8389,6 +8590,7 @@
           <a:lstStyle/>
           <a:p>
             <a:pPr algn="ctr"/>
+            <a:endParaRPr/>
           </a:p>
         </p:txBody>
       </p:sp>
@@ -8433,6 +8635,7 @@
           <a:lstStyle/>
           <a:p>
             <a:pPr algn="ctr"/>
+            <a:endParaRPr/>
           </a:p>
         </p:txBody>
       </p:sp>
@@ -8477,6 +8680,7 @@
           <a:lstStyle/>
           <a:p>
             <a:pPr algn="ctr"/>
+            <a:endParaRPr/>
           </a:p>
         </p:txBody>
       </p:sp>
@@ -8521,6 +8725,7 @@
           <a:lstStyle/>
           <a:p>
             <a:pPr algn="ctr"/>
+            <a:endParaRPr/>
           </a:p>
         </p:txBody>
       </p:sp>
@@ -8565,6 +8770,7 @@
           <a:lstStyle/>
           <a:p>
             <a:pPr algn="ctr"/>
+            <a:endParaRPr/>
           </a:p>
         </p:txBody>
       </p:sp>
@@ -8633,14 +8839,14 @@
           <a:noFill/>
         </p:spPr>
         <p:txBody>
-          <a:bodyPr wrap="square" lIns="0" rIns="0" tIns="0" bIns="0" anchor="t">
+          <a:bodyPr wrap="square" lIns="0" tIns="0" rIns="0" bIns="0" anchor="t">
             <a:spAutoFit/>
           </a:bodyPr>
           <a:lstStyle/>
           <a:p>
             <a:pPr algn="l"/>
             <a:r>
-              <a:rPr b="1" sz="2550" i="0" u="none">
+              <a:rPr sz="2550" b="1" i="0" u="none">
                 <a:solidFill>
                   <a:srgbClr val="0F172A"/>
                 </a:solidFill>
@@ -8660,7 +8866,7 @@
 </file>
 
 <file path=ppt/slides/slide3.xml><?xml version="1.0" encoding="utf-8"?>
-<p:sld xmlns:a="http://schemas.openxmlformats.org/drawingml/2006/main" xmlns:p="http://schemas.openxmlformats.org/presentationml/2006/main" xmlns:r="http://schemas.openxmlformats.org/officeDocument/2006/relationships">
+<p:sld xmlns:a="http://schemas.openxmlformats.org/drawingml/2006/main" xmlns:r="http://schemas.openxmlformats.org/officeDocument/2006/relationships" xmlns:p="http://schemas.openxmlformats.org/presentationml/2006/main">
   <p:cSld>
     <p:bg>
       <p:bgPr>
@@ -8676,7 +8882,14 @@
         <p:cNvGrpSpPr/>
         <p:nvPr/>
       </p:nvGrpSpPr>
-      <p:grpSpPr/>
+      <p:grpSpPr>
+        <a:xfrm>
+          <a:off x="0" y="0"/>
+          <a:ext cx="0" cy="0"/>
+          <a:chOff x="0" y="0"/>
+          <a:chExt cx="0" cy="0"/>
+        </a:xfrm>
+      </p:grpSpPr>
       <p:pic>
         <p:nvPicPr>
           <p:cNvPr id="2" name="Picture 1" descr="image.png"/>
@@ -8718,7 +8931,7 @@
           <a:noFill/>
         </p:spPr>
         <p:txBody>
-          <a:bodyPr wrap="square" lIns="0" rIns="0" tIns="0" bIns="0" anchor="t">
+          <a:bodyPr wrap="square" lIns="0" tIns="0" rIns="0" bIns="0" anchor="t">
             <a:spAutoFit/>
           </a:bodyPr>
           <a:lstStyle/>
@@ -8729,7 +8942,7 @@
               </a:lnSpc>
             </a:pPr>
             <a:r>
-              <a:rPr b="1" sz="1200" i="0" u="none">
+              <a:rPr sz="1200" b="1" i="0" u="none">
                 <a:solidFill>
                   <a:srgbClr val="0F172A"/>
                 </a:solidFill>
@@ -8742,7 +8955,7 @@
 </a:t>
             </a:r>
             <a:r>
-              <a:rPr b="0" sz="1200" i="0" u="none">
+              <a:rPr sz="1200" b="0" i="0" u="none">
                 <a:solidFill>
                   <a:srgbClr val="475569"/>
                 </a:solidFill>
@@ -8770,7 +8983,7 @@
           <a:noFill/>
         </p:spPr>
         <p:txBody>
-          <a:bodyPr wrap="square" lIns="0" rIns="0" tIns="0" bIns="0" anchor="t">
+          <a:bodyPr wrap="square" lIns="0" tIns="0" rIns="0" bIns="0" anchor="t">
             <a:spAutoFit/>
           </a:bodyPr>
           <a:lstStyle/>
@@ -8781,7 +8994,7 @@
               </a:lnSpc>
             </a:pPr>
             <a:r>
-              <a:rPr b="1" sz="1200" i="0" u="none">
+              <a:rPr sz="1200" b="1" i="0" u="none">
                 <a:solidFill>
                   <a:srgbClr val="0F172A"/>
                 </a:solidFill>
@@ -8794,7 +9007,7 @@
 </a:t>
             </a:r>
             <a:r>
-              <a:rPr b="0" sz="1200" i="0" u="none">
+              <a:rPr sz="1200" b="0" i="0" u="none">
                 <a:solidFill>
                   <a:srgbClr val="475569"/>
                 </a:solidFill>
@@ -8822,7 +9035,7 @@
           <a:noFill/>
         </p:spPr>
         <p:txBody>
-          <a:bodyPr wrap="square" lIns="0" rIns="0" tIns="0" bIns="0" anchor="t">
+          <a:bodyPr wrap="square" lIns="0" tIns="0" rIns="0" bIns="0" anchor="t">
             <a:spAutoFit/>
           </a:bodyPr>
           <a:lstStyle/>
@@ -8833,7 +9046,7 @@
               </a:lnSpc>
             </a:pPr>
             <a:r>
-              <a:rPr b="1" sz="1200" i="0" u="none">
+              <a:rPr sz="1200" b="1" i="0" u="none">
                 <a:solidFill>
                   <a:srgbClr val="0F172A"/>
                 </a:solidFill>
@@ -8846,7 +9059,7 @@
 </a:t>
             </a:r>
             <a:r>
-              <a:rPr b="0" sz="1200" i="0" u="none">
+              <a:rPr sz="1200" b="0" i="0" u="none">
                 <a:solidFill>
                   <a:srgbClr val="475569"/>
                 </a:solidFill>
@@ -8874,7 +9087,7 @@
           <a:noFill/>
         </p:spPr>
         <p:txBody>
-          <a:bodyPr wrap="square" lIns="0" rIns="0" tIns="0" bIns="0" anchor="t">
+          <a:bodyPr wrap="square" lIns="0" tIns="0" rIns="0" bIns="0" anchor="t">
             <a:spAutoFit/>
           </a:bodyPr>
           <a:lstStyle/>
@@ -8885,7 +9098,7 @@
               </a:lnSpc>
             </a:pPr>
             <a:r>
-              <a:rPr b="1" sz="1200" i="0" u="none">
+              <a:rPr sz="1200" b="1" i="0" u="none">
                 <a:solidFill>
                   <a:srgbClr val="0F172A"/>
                 </a:solidFill>
@@ -8898,7 +9111,7 @@
 </a:t>
             </a:r>
             <a:r>
-              <a:rPr b="0" sz="1200" i="0" u="none">
+              <a:rPr sz="1200" b="0" i="0" u="none">
                 <a:solidFill>
                   <a:srgbClr val="475569"/>
                 </a:solidFill>
@@ -9022,14 +9235,14 @@
           <a:noFill/>
         </p:spPr>
         <p:txBody>
-          <a:bodyPr wrap="square" lIns="0" rIns="0" tIns="0" bIns="0" anchor="t">
+          <a:bodyPr wrap="square" lIns="0" tIns="0" rIns="0" bIns="0" anchor="t">
             <a:spAutoFit/>
           </a:bodyPr>
           <a:lstStyle/>
           <a:p>
             <a:pPr algn="l"/>
             <a:r>
-              <a:rPr b="1" sz="2550" i="0" u="none">
+              <a:rPr sz="2550" b="1" i="0" u="none">
                 <a:solidFill>
                   <a:srgbClr val="0F172A"/>
                 </a:solidFill>
@@ -9049,7 +9262,7 @@
 </file>
 
 <file path=ppt/slides/slide4.xml><?xml version="1.0" encoding="utf-8"?>
-<p:sld xmlns:a="http://schemas.openxmlformats.org/drawingml/2006/main" xmlns:p="http://schemas.openxmlformats.org/presentationml/2006/main" xmlns:r="http://schemas.openxmlformats.org/officeDocument/2006/relationships">
+<p:sld xmlns:a="http://schemas.openxmlformats.org/drawingml/2006/main" xmlns:r="http://schemas.openxmlformats.org/officeDocument/2006/relationships" xmlns:p="http://schemas.openxmlformats.org/presentationml/2006/main">
   <p:cSld>
     <p:bg>
       <p:bgPr>
@@ -9065,7 +9278,14 @@
         <p:cNvGrpSpPr/>
         <p:nvPr/>
       </p:nvGrpSpPr>
-      <p:grpSpPr/>
+      <p:grpSpPr>
+        <a:xfrm>
+          <a:off x="0" y="0"/>
+          <a:ext cx="0" cy="0"/>
+          <a:chOff x="0" y="0"/>
+          <a:chExt cx="0" cy="0"/>
+        </a:xfrm>
+      </p:grpSpPr>
       <p:pic>
         <p:nvPicPr>
           <p:cNvPr id="2" name="Picture 1" descr="image.png"/>
@@ -9155,14 +9375,14 @@
           <a:noFill/>
         </p:spPr>
         <p:txBody>
-          <a:bodyPr wrap="square" lIns="0" rIns="0" tIns="0" bIns="0" anchor="t">
+          <a:bodyPr wrap="square" lIns="0" tIns="0" rIns="0" bIns="0" anchor="t">
             <a:spAutoFit/>
           </a:bodyPr>
           <a:lstStyle/>
           <a:p>
             <a:pPr algn="ctr"/>
             <a:r>
-              <a:rPr b="1" sz="3600" i="0" u="none">
+              <a:rPr sz="3600" b="1" i="0" u="none">
                 <a:solidFill>
                   <a:srgbClr val="FFFFFF"/>
                 </a:solidFill>
@@ -9214,6 +9434,7 @@
           <a:lstStyle/>
           <a:p>
             <a:pPr algn="ctr"/>
+            <a:endParaRPr/>
           </a:p>
         </p:txBody>
       </p:sp>
@@ -9234,7 +9455,7 @@
           <a:noFill/>
         </p:spPr>
         <p:txBody>
-          <a:bodyPr wrap="square" lIns="0" rIns="0" tIns="0" bIns="0" anchor="t">
+          <a:bodyPr wrap="square" lIns="0" tIns="0" rIns="0" bIns="0" anchor="t">
             <a:spAutoFit/>
           </a:bodyPr>
           <a:lstStyle/>
@@ -9245,7 +9466,7 @@
               </a:lnSpc>
             </a:pPr>
             <a:r>
-              <a:rPr b="0" sz="1425" i="0" u="none">
+              <a:rPr sz="1425" b="0" i="0" u="none">
                 <a:solidFill>
                   <a:srgbClr val="94A3B8"/>
                 </a:solidFill>
@@ -9265,7 +9486,7 @@
 </file>
 
 <file path=ppt/slides/slide5.xml><?xml version="1.0" encoding="utf-8"?>
-<p:sld xmlns:a="http://schemas.openxmlformats.org/drawingml/2006/main" xmlns:p="http://schemas.openxmlformats.org/presentationml/2006/main" xmlns:r="http://schemas.openxmlformats.org/officeDocument/2006/relationships">
+<p:sld xmlns:a="http://schemas.openxmlformats.org/drawingml/2006/main" xmlns:r="http://schemas.openxmlformats.org/officeDocument/2006/relationships" xmlns:p="http://schemas.openxmlformats.org/presentationml/2006/main">
   <p:cSld>
     <p:bg>
       <p:bgPr>
@@ -9281,7 +9502,14 @@
         <p:cNvGrpSpPr/>
         <p:nvPr/>
       </p:nvGrpSpPr>
-      <p:grpSpPr/>
+      <p:grpSpPr>
+        <a:xfrm>
+          <a:off x="0" y="0"/>
+          <a:ext cx="0" cy="0"/>
+          <a:chOff x="0" y="0"/>
+          <a:chExt cx="0" cy="0"/>
+        </a:xfrm>
+      </p:grpSpPr>
       <p:pic>
         <p:nvPicPr>
           <p:cNvPr id="2" name="Picture 1" descr="image.png"/>
@@ -9395,14 +9623,14 @@
           <a:noFill/>
         </p:spPr>
         <p:txBody>
-          <a:bodyPr wrap="square" lIns="0" rIns="0" tIns="0" bIns="0" anchor="t">
+          <a:bodyPr wrap="square" lIns="0" tIns="0" rIns="0" bIns="0" anchor="t">
             <a:spAutoFit/>
           </a:bodyPr>
           <a:lstStyle/>
           <a:p>
             <a:pPr algn="l"/>
             <a:r>
-              <a:rPr b="0" sz="1500" i="0" u="none">
+              <a:rPr sz="1500" b="0" i="0" u="none">
                 <a:solidFill>
                   <a:srgbClr val="2563EB"/>
                 </a:solidFill>
@@ -9430,7 +9658,7 @@
           <a:noFill/>
         </p:spPr>
         <p:txBody>
-          <a:bodyPr wrap="square" lIns="0" rIns="0" tIns="0" bIns="0" anchor="t">
+          <a:bodyPr wrap="square" lIns="0" tIns="0" rIns="0" bIns="0" anchor="t">
             <a:spAutoFit/>
           </a:bodyPr>
           <a:lstStyle/>
@@ -9441,7 +9669,7 @@
               </a:lnSpc>
             </a:pPr>
             <a:r>
-              <a:rPr b="1" sz="1125" i="0" u="none">
+              <a:rPr sz="1125" b="1" i="0" u="none">
                 <a:solidFill>
                   <a:srgbClr val="475569"/>
                 </a:solidFill>
@@ -9450,7 +9678,7 @@
               <a:t>Primary Focus:</a:t>
             </a:r>
             <a:r>
-              <a:rPr b="0" sz="1125" i="0" u="none">
+              <a:rPr sz="1125" b="0" i="0" u="none">
                 <a:solidFill>
                   <a:srgbClr val="475569"/>
                 </a:solidFill>
@@ -9478,7 +9706,7 @@
           <a:noFill/>
         </p:spPr>
         <p:txBody>
-          <a:bodyPr wrap="square" lIns="0" rIns="0" tIns="0" bIns="0" anchor="t">
+          <a:bodyPr wrap="square" lIns="0" tIns="0" rIns="0" bIns="0" anchor="t">
             <a:spAutoFit/>
           </a:bodyPr>
           <a:lstStyle/>
@@ -9489,7 +9717,7 @@
               </a:lnSpc>
             </a:pPr>
             <a:r>
-              <a:rPr b="1" sz="1125" i="0" u="none">
+              <a:rPr sz="1125" b="1" i="0" u="none">
                 <a:solidFill>
                   <a:srgbClr val="475569"/>
                 </a:solidFill>
@@ -9498,7 +9726,7 @@
               <a:t>Scope:</a:t>
             </a:r>
             <a:r>
-              <a:rPr b="0" sz="1125" i="0" u="none">
+              <a:rPr sz="1125" b="0" i="0" u="none">
                 <a:solidFill>
                   <a:srgbClr val="475569"/>
                 </a:solidFill>
@@ -9526,7 +9754,7 @@
           <a:noFill/>
         </p:spPr>
         <p:txBody>
-          <a:bodyPr wrap="square" lIns="0" rIns="0" tIns="0" bIns="0" anchor="t">
+          <a:bodyPr wrap="square" lIns="0" tIns="0" rIns="0" bIns="0" anchor="t">
             <a:spAutoFit/>
           </a:bodyPr>
           <a:lstStyle/>
@@ -9537,7 +9765,7 @@
               </a:lnSpc>
             </a:pPr>
             <a:r>
-              <a:rPr b="1" sz="1125" i="0" u="none">
+              <a:rPr sz="1125" b="1" i="0" u="none">
                 <a:solidFill>
                   <a:srgbClr val="475569"/>
                 </a:solidFill>
@@ -9546,7 +9774,7 @@
               <a:t>Value Creation:</a:t>
             </a:r>
             <a:r>
-              <a:rPr b="0" sz="1125" i="0" u="none">
+              <a:rPr sz="1125" b="0" i="0" u="none">
                 <a:solidFill>
                   <a:srgbClr val="475569"/>
                 </a:solidFill>
@@ -9598,14 +9826,14 @@
           <a:noFill/>
         </p:spPr>
         <p:txBody>
-          <a:bodyPr wrap="square" lIns="0" rIns="0" tIns="0" bIns="0" anchor="t">
+          <a:bodyPr wrap="square" lIns="0" tIns="0" rIns="0" bIns="0" anchor="t">
             <a:spAutoFit/>
           </a:bodyPr>
           <a:lstStyle/>
           <a:p>
             <a:pPr algn="l"/>
             <a:r>
-              <a:rPr b="0" sz="1500" i="0" u="none">
+              <a:rPr sz="1500" b="0" i="0" u="none">
                 <a:solidFill>
                   <a:srgbClr val="2563EB"/>
                 </a:solidFill>
@@ -9633,7 +9861,7 @@
           <a:noFill/>
         </p:spPr>
         <p:txBody>
-          <a:bodyPr wrap="square" lIns="0" rIns="0" tIns="0" bIns="0" anchor="t">
+          <a:bodyPr wrap="square" lIns="0" tIns="0" rIns="0" bIns="0" anchor="t">
             <a:spAutoFit/>
           </a:bodyPr>
           <a:lstStyle/>
@@ -9644,7 +9872,7 @@
               </a:lnSpc>
             </a:pPr>
             <a:r>
-              <a:rPr b="1" sz="1125" i="0" u="none">
+              <a:rPr sz="1125" b="1" i="0" u="none">
                 <a:solidFill>
                   <a:srgbClr val="475569"/>
                 </a:solidFill>
@@ -9653,7 +9881,7 @@
               <a:t>Primary Focus:</a:t>
             </a:r>
             <a:r>
-              <a:rPr b="0" sz="1125" i="0" u="none">
+              <a:rPr sz="1125" b="0" i="0" u="none">
                 <a:solidFill>
                   <a:srgbClr val="475569"/>
                 </a:solidFill>
@@ -9681,7 +9909,7 @@
           <a:noFill/>
         </p:spPr>
         <p:txBody>
-          <a:bodyPr wrap="square" lIns="0" rIns="0" tIns="0" bIns="0" anchor="t">
+          <a:bodyPr wrap="square" lIns="0" tIns="0" rIns="0" bIns="0" anchor="t">
             <a:spAutoFit/>
           </a:bodyPr>
           <a:lstStyle/>
@@ -9692,7 +9920,7 @@
               </a:lnSpc>
             </a:pPr>
             <a:r>
-              <a:rPr b="1" sz="1125" i="0" u="none">
+              <a:rPr sz="1125" b="1" i="0" u="none">
                 <a:solidFill>
                   <a:srgbClr val="475569"/>
                 </a:solidFill>
@@ -9701,7 +9929,7 @@
               <a:t>Scope:</a:t>
             </a:r>
             <a:r>
-              <a:rPr b="0" sz="1125" i="0" u="none">
+              <a:rPr sz="1125" b="0" i="0" u="none">
                 <a:solidFill>
                   <a:srgbClr val="475569"/>
                 </a:solidFill>
@@ -9729,7 +9957,7 @@
           <a:noFill/>
         </p:spPr>
         <p:txBody>
-          <a:bodyPr wrap="square" lIns="0" rIns="0" tIns="0" bIns="0" anchor="t">
+          <a:bodyPr wrap="square" lIns="0" tIns="0" rIns="0" bIns="0" anchor="t">
             <a:spAutoFit/>
           </a:bodyPr>
           <a:lstStyle/>
@@ -9740,7 +9968,7 @@
               </a:lnSpc>
             </a:pPr>
             <a:r>
-              <a:rPr b="1" sz="1125" i="0" u="none">
+              <a:rPr sz="1125" b="1" i="0" u="none">
                 <a:solidFill>
                   <a:srgbClr val="475569"/>
                 </a:solidFill>
@@ -9749,7 +9977,7 @@
               <a:t>Value Creation:</a:t>
             </a:r>
             <a:r>
-              <a:rPr b="0" sz="1125" i="0" u="none">
+              <a:rPr sz="1125" b="0" i="0" u="none">
                 <a:solidFill>
                   <a:srgbClr val="475569"/>
                 </a:solidFill>
@@ -9777,14 +10005,14 @@
           <a:noFill/>
         </p:spPr>
         <p:txBody>
-          <a:bodyPr wrap="square" lIns="0" rIns="0" tIns="0" bIns="0" anchor="t">
+          <a:bodyPr wrap="square" lIns="0" tIns="0" rIns="0" bIns="0" anchor="t">
             <a:spAutoFit/>
           </a:bodyPr>
           <a:lstStyle/>
           <a:p>
             <a:pPr algn="l"/>
             <a:r>
-              <a:rPr b="1" sz="2550" i="0" u="none">
+              <a:rPr sz="2550" b="1" i="0" u="none">
                 <a:solidFill>
                   <a:srgbClr val="0F172A"/>
                 </a:solidFill>
@@ -9804,7 +10032,7 @@
 </file>
 
 <file path=ppt/slides/slide6.xml><?xml version="1.0" encoding="utf-8"?>
-<p:sld xmlns:a="http://schemas.openxmlformats.org/drawingml/2006/main" xmlns:p="http://schemas.openxmlformats.org/presentationml/2006/main" xmlns:r="http://schemas.openxmlformats.org/officeDocument/2006/relationships">
+<p:sld xmlns:a="http://schemas.openxmlformats.org/drawingml/2006/main" xmlns:r="http://schemas.openxmlformats.org/officeDocument/2006/relationships" xmlns:p="http://schemas.openxmlformats.org/presentationml/2006/main">
   <p:cSld>
     <p:bg>
       <p:bgPr>
@@ -9820,7 +10048,14 @@
         <p:cNvGrpSpPr/>
         <p:nvPr/>
       </p:nvGrpSpPr>
-      <p:grpSpPr/>
+      <p:grpSpPr>
+        <a:xfrm>
+          <a:off x="0" y="0"/>
+          <a:ext cx="0" cy="0"/>
+          <a:chOff x="0" y="0"/>
+          <a:chExt cx="0" cy="0"/>
+        </a:xfrm>
+      </p:grpSpPr>
       <p:pic>
         <p:nvPicPr>
           <p:cNvPr id="2" name="Picture 1" descr="image.png"/>
@@ -9862,14 +10097,14 @@
           <a:noFill/>
         </p:spPr>
         <p:txBody>
-          <a:bodyPr wrap="square" lIns="0" rIns="0" tIns="0" bIns="0" anchor="t">
+          <a:bodyPr wrap="square" lIns="0" tIns="0" rIns="0" bIns="0" anchor="t">
             <a:spAutoFit/>
           </a:bodyPr>
           <a:lstStyle/>
           <a:p>
             <a:pPr algn="l"/>
             <a:r>
-              <a:rPr b="1" sz="2550" i="0" u="none">
+              <a:rPr sz="2550" b="1" i="0" u="none">
                 <a:solidFill>
                   <a:srgbClr val="0F172A"/>
                 </a:solidFill>
@@ -9921,14 +10156,14 @@
           <a:noFill/>
         </p:spPr>
         <p:txBody>
-          <a:bodyPr wrap="square" lIns="0" rIns="0" tIns="0" bIns="0" anchor="t">
+          <a:bodyPr wrap="square" lIns="0" tIns="0" rIns="0" bIns="0" anchor="t">
             <a:spAutoFit/>
           </a:bodyPr>
           <a:lstStyle/>
           <a:p>
             <a:pPr algn="l"/>
             <a:r>
-              <a:rPr b="0" sz="1500" i="0" u="none">
+              <a:rPr sz="1500" b="0" i="0" u="none">
                 <a:solidFill>
                   <a:srgbClr val="1E293B"/>
                 </a:solidFill>
@@ -9956,7 +10191,7 @@
           <a:noFill/>
         </p:spPr>
         <p:txBody>
-          <a:bodyPr wrap="square" lIns="0" rIns="0" tIns="0" bIns="0" anchor="t">
+          <a:bodyPr wrap="square" lIns="0" tIns="0" rIns="0" bIns="0" anchor="t">
             <a:spAutoFit/>
           </a:bodyPr>
           <a:lstStyle/>
@@ -9967,7 +10202,7 @@
               </a:lnSpc>
             </a:pPr>
             <a:r>
-              <a:rPr b="0" sz="1125" i="0" u="none">
+              <a:rPr sz="1125" b="0" i="0" u="none">
                 <a:solidFill>
                   <a:srgbClr val="475569"/>
                 </a:solidFill>
@@ -9995,7 +10230,7 @@
           <a:noFill/>
         </p:spPr>
         <p:txBody>
-          <a:bodyPr wrap="square" lIns="0" rIns="0" tIns="0" bIns="0" anchor="t">
+          <a:bodyPr wrap="square" lIns="0" tIns="0" rIns="0" bIns="0" anchor="t">
             <a:spAutoFit/>
           </a:bodyPr>
           <a:lstStyle/>
@@ -10006,7 +10241,7 @@
               </a:lnSpc>
             </a:pPr>
             <a:r>
-              <a:rPr b="1" sz="1125" i="0" u="none">
+              <a:rPr sz="1125" b="1" i="0" u="none">
                 <a:solidFill>
                   <a:srgbClr val="475569"/>
                 </a:solidFill>
@@ -10015,7 +10250,7 @@
               <a:t>1. Web Presence (1990s):</a:t>
             </a:r>
             <a:r>
-              <a:rPr b="0" sz="1125" i="0" u="none">
+              <a:rPr sz="1125" b="0" i="0" u="none">
                 <a:solidFill>
                   <a:srgbClr val="475569"/>
                 </a:solidFill>
@@ -10043,7 +10278,7 @@
           <a:noFill/>
         </p:spPr>
         <p:txBody>
-          <a:bodyPr wrap="square" lIns="0" rIns="0" tIns="0" bIns="0" anchor="t">
+          <a:bodyPr wrap="square" lIns="0" tIns="0" rIns="0" bIns="0" anchor="t">
             <a:spAutoFit/>
           </a:bodyPr>
           <a:lstStyle/>
@@ -10054,7 +10289,7 @@
               </a:lnSpc>
             </a:pPr>
             <a:r>
-              <a:rPr b="1" sz="1125" i="0" u="none">
+              <a:rPr sz="1125" b="1" i="0" u="none">
                 <a:solidFill>
                   <a:srgbClr val="475569"/>
                 </a:solidFill>
@@ -10063,7 +10298,7 @@
               <a:t>2. E-Commerce Era (2000s):</a:t>
             </a:r>
             <a:r>
-              <a:rPr b="0" sz="1125" i="0" u="none">
+              <a:rPr sz="1125" b="0" i="0" u="none">
                 <a:solidFill>
                   <a:srgbClr val="475569"/>
                 </a:solidFill>
@@ -10091,7 +10326,7 @@
           <a:noFill/>
         </p:spPr>
         <p:txBody>
-          <a:bodyPr wrap="square" lIns="0" rIns="0" tIns="0" bIns="0" anchor="t">
+          <a:bodyPr wrap="square" lIns="0" tIns="0" rIns="0" bIns="0" anchor="t">
             <a:spAutoFit/>
           </a:bodyPr>
           <a:lstStyle/>
@@ -10102,7 +10337,7 @@
               </a:lnSpc>
             </a:pPr>
             <a:r>
-              <a:rPr b="1" sz="1125" i="0" u="none">
+              <a:rPr sz="1125" b="1" i="0" u="none">
                 <a:solidFill>
                   <a:srgbClr val="475569"/>
                 </a:solidFill>
@@ -10111,7 +10346,7 @@
               <a:t>3. Digital Business (Present):</a:t>
             </a:r>
             <a:r>
-              <a:rPr b="0" sz="1125" i="0" u="none">
+              <a:rPr sz="1125" b="0" i="0" u="none">
                 <a:solidFill>
                   <a:srgbClr val="475569"/>
                 </a:solidFill>
@@ -10131,7 +10366,7 @@
 </file>
 
 <file path=ppt/slides/slide7.xml><?xml version="1.0" encoding="utf-8"?>
-<p:sld xmlns:a="http://schemas.openxmlformats.org/drawingml/2006/main" xmlns:p="http://schemas.openxmlformats.org/presentationml/2006/main" xmlns:r="http://schemas.openxmlformats.org/officeDocument/2006/relationships">
+<p:sld xmlns:a="http://schemas.openxmlformats.org/drawingml/2006/main" xmlns:r="http://schemas.openxmlformats.org/officeDocument/2006/relationships" xmlns:p="http://schemas.openxmlformats.org/presentationml/2006/main">
   <p:cSld>
     <p:bg>
       <p:bgPr>
@@ -10147,7 +10382,14 @@
         <p:cNvGrpSpPr/>
         <p:nvPr/>
       </p:nvGrpSpPr>
-      <p:grpSpPr/>
+      <p:grpSpPr>
+        <a:xfrm>
+          <a:off x="0" y="0"/>
+          <a:ext cx="0" cy="0"/>
+          <a:chOff x="0" y="0"/>
+          <a:chExt cx="0" cy="0"/>
+        </a:xfrm>
+      </p:grpSpPr>
       <p:pic>
         <p:nvPicPr>
           <p:cNvPr id="2" name="Picture 1" descr="image.png"/>
@@ -10285,7 +10527,7 @@
           <a:noFill/>
         </p:spPr>
         <p:txBody>
-          <a:bodyPr wrap="square" lIns="0" rIns="0" tIns="0" bIns="0" anchor="t">
+          <a:bodyPr wrap="square" lIns="0" tIns="0" rIns="0" bIns="0" anchor="t">
             <a:spAutoFit/>
           </a:bodyPr>
           <a:lstStyle/>
@@ -10296,7 +10538,7 @@
               </a:lnSpc>
             </a:pPr>
             <a:r>
-              <a:rPr b="0" sz="1200" i="0" u="none">
+              <a:rPr sz="1200" b="0" i="0" u="none">
                 <a:solidFill>
                   <a:srgbClr val="1E293B"/>
                 </a:solidFill>
@@ -10372,14 +10614,14 @@
           <a:noFill/>
         </p:spPr>
         <p:txBody>
-          <a:bodyPr wrap="square" lIns="0" rIns="0" tIns="0" bIns="0" anchor="t">
+          <a:bodyPr wrap="square" lIns="0" tIns="0" rIns="0" bIns="0" anchor="t">
             <a:spAutoFit/>
           </a:bodyPr>
           <a:lstStyle/>
           <a:p>
             <a:pPr algn="l"/>
             <a:r>
-              <a:rPr b="0" sz="1500" i="0" u="none">
+              <a:rPr sz="1500" b="0" i="0" u="none">
                 <a:solidFill>
                   <a:srgbClr val="1E293B"/>
                 </a:solidFill>
@@ -10407,7 +10649,7 @@
           <a:noFill/>
         </p:spPr>
         <p:txBody>
-          <a:bodyPr wrap="square" lIns="0" rIns="0" tIns="0" bIns="0" anchor="t">
+          <a:bodyPr wrap="square" lIns="0" tIns="0" rIns="0" bIns="0" anchor="t">
             <a:spAutoFit/>
           </a:bodyPr>
           <a:lstStyle/>
@@ -10418,7 +10660,7 @@
               </a:lnSpc>
             </a:pPr>
             <a:r>
-              <a:rPr b="0" sz="1125" i="0" u="none">
+              <a:rPr sz="1125" b="0" i="0" u="none">
                 <a:solidFill>
                   <a:srgbClr val="475569"/>
                 </a:solidFill>
@@ -10427,7 +10669,7 @@
               <a:t>Analyze Company X's current model. List 3 functions that are purely </a:t>
             </a:r>
             <a:r>
-              <a:rPr b="0" sz="1125" i="1" u="none">
+              <a:rPr sz="1125" b="0" i="1" u="none">
                 <a:solidFill>
                   <a:srgbClr val="475569"/>
                 </a:solidFill>
@@ -10436,7 +10678,7 @@
               <a:t>e-commerce</a:t>
             </a:r>
             <a:r>
-              <a:rPr b="0" sz="1125" i="0" u="none">
+              <a:rPr sz="1125" b="0" i="0" u="none">
                 <a:solidFill>
                   <a:srgbClr val="475569"/>
                 </a:solidFill>
@@ -10445,7 +10687,7 @@
               <a:t> vs. 3 that reflect a </a:t>
             </a:r>
             <a:r>
-              <a:rPr b="0" sz="1125" i="1" u="none">
+              <a:rPr sz="1125" b="0" i="1" u="none">
                 <a:solidFill>
                   <a:srgbClr val="475569"/>
                 </a:solidFill>
@@ -10454,7 +10696,7 @@
               <a:t>digital business</a:t>
             </a:r>
             <a:r>
-              <a:rPr b="0" sz="1125" i="0" u="none">
+              <a:rPr sz="1125" b="0" i="0" u="none">
                 <a:solidFill>
                   <a:srgbClr val="475569"/>
                 </a:solidFill>
@@ -10506,14 +10748,14 @@
           <a:noFill/>
         </p:spPr>
         <p:txBody>
-          <a:bodyPr wrap="square" lIns="0" rIns="0" tIns="0" bIns="0" anchor="t">
+          <a:bodyPr wrap="square" lIns="0" tIns="0" rIns="0" bIns="0" anchor="t">
             <a:spAutoFit/>
           </a:bodyPr>
           <a:lstStyle/>
           <a:p>
             <a:pPr algn="l"/>
             <a:r>
-              <a:rPr b="0" sz="1500" i="0" u="none">
+              <a:rPr sz="1500" b="0" i="0" u="none">
                 <a:solidFill>
                   <a:srgbClr val="1E293B"/>
                 </a:solidFill>
@@ -10541,7 +10783,7 @@
           <a:noFill/>
         </p:spPr>
         <p:txBody>
-          <a:bodyPr wrap="square" lIns="0" rIns="0" tIns="0" bIns="0" anchor="t">
+          <a:bodyPr wrap="square" lIns="0" tIns="0" rIns="0" bIns="0" anchor="t">
             <a:spAutoFit/>
           </a:bodyPr>
           <a:lstStyle/>
@@ -10552,7 +10794,7 @@
               </a:lnSpc>
             </a:pPr>
             <a:r>
-              <a:rPr b="0" sz="1125" i="0" u="none">
+              <a:rPr sz="1125" b="0" i="0" u="none">
                 <a:solidFill>
                   <a:srgbClr val="475569"/>
                 </a:solidFill>
@@ -10604,14 +10846,14 @@
           <a:noFill/>
         </p:spPr>
         <p:txBody>
-          <a:bodyPr wrap="square" lIns="0" rIns="0" tIns="0" bIns="0" anchor="t">
+          <a:bodyPr wrap="square" lIns="0" tIns="0" rIns="0" bIns="0" anchor="t">
             <a:spAutoFit/>
           </a:bodyPr>
           <a:lstStyle/>
           <a:p>
             <a:pPr algn="l"/>
             <a:r>
-              <a:rPr b="0" sz="1500" i="0" u="none">
+              <a:rPr sz="1500" b="0" i="0" u="none">
                 <a:solidFill>
                   <a:srgbClr val="1E293B"/>
                 </a:solidFill>
@@ -10639,7 +10881,7 @@
           <a:noFill/>
         </p:spPr>
         <p:txBody>
-          <a:bodyPr wrap="square" lIns="0" rIns="0" tIns="0" bIns="0" anchor="t">
+          <a:bodyPr wrap="square" lIns="0" tIns="0" rIns="0" bIns="0" anchor="t">
             <a:spAutoFit/>
           </a:bodyPr>
           <a:lstStyle/>
@@ -10650,7 +10892,7 @@
               </a:lnSpc>
             </a:pPr>
             <a:r>
-              <a:rPr b="0" sz="1125" i="0" u="none">
+              <a:rPr sz="1125" b="0" i="0" u="none">
                 <a:solidFill>
                   <a:srgbClr val="475569"/>
                 </a:solidFill>
@@ -10750,14 +10992,14 @@
           <a:noFill/>
         </p:spPr>
         <p:txBody>
-          <a:bodyPr wrap="square" lIns="0" rIns="0" tIns="0" bIns="0" anchor="t">
+          <a:bodyPr wrap="square" lIns="0" tIns="0" rIns="0" bIns="0" anchor="t">
             <a:spAutoFit/>
           </a:bodyPr>
           <a:lstStyle/>
           <a:p>
             <a:pPr algn="l"/>
             <a:r>
-              <a:rPr b="1" sz="2550" i="0" u="none">
+              <a:rPr sz="2550" b="1" i="0" u="none">
                 <a:solidFill>
                   <a:srgbClr val="0F172A"/>
                 </a:solidFill>
@@ -10777,7 +11019,7 @@
 </file>
 
 <file path=ppt/slides/slide8.xml><?xml version="1.0" encoding="utf-8"?>
-<p:sld xmlns:a="http://schemas.openxmlformats.org/drawingml/2006/main" xmlns:p="http://schemas.openxmlformats.org/presentationml/2006/main" xmlns:r="http://schemas.openxmlformats.org/officeDocument/2006/relationships">
+<p:sld xmlns:a="http://schemas.openxmlformats.org/drawingml/2006/main" xmlns:r="http://schemas.openxmlformats.org/officeDocument/2006/relationships" xmlns:p="http://schemas.openxmlformats.org/presentationml/2006/main">
   <p:cSld>
     <p:bg>
       <p:bgPr>
@@ -10793,7 +11035,14 @@
         <p:cNvGrpSpPr/>
         <p:nvPr/>
       </p:nvGrpSpPr>
-      <p:grpSpPr/>
+      <p:grpSpPr>
+        <a:xfrm>
+          <a:off x="0" y="0"/>
+          <a:ext cx="0" cy="0"/>
+          <a:chOff x="0" y="0"/>
+          <a:chExt cx="0" cy="0"/>
+        </a:xfrm>
+      </p:grpSpPr>
       <p:pic>
         <p:nvPicPr>
           <p:cNvPr id="2" name="Picture 1" descr="image.png"/>
@@ -10883,14 +11132,14 @@
           <a:noFill/>
         </p:spPr>
         <p:txBody>
-          <a:bodyPr wrap="square" lIns="0" rIns="0" tIns="0" bIns="0" anchor="t">
+          <a:bodyPr wrap="square" lIns="0" tIns="0" rIns="0" bIns="0" anchor="t">
             <a:spAutoFit/>
           </a:bodyPr>
           <a:lstStyle/>
           <a:p>
             <a:pPr algn="ctr"/>
             <a:r>
-              <a:rPr b="1" sz="3600" i="0" u="none">
+              <a:rPr sz="3600" b="1" i="0" u="none">
                 <a:solidFill>
                   <a:srgbClr val="FFFFFF"/>
                 </a:solidFill>
@@ -10942,6 +11191,7 @@
           <a:lstStyle/>
           <a:p>
             <a:pPr algn="ctr"/>
+            <a:endParaRPr/>
           </a:p>
         </p:txBody>
       </p:sp>
@@ -10962,7 +11212,7 @@
           <a:noFill/>
         </p:spPr>
         <p:txBody>
-          <a:bodyPr wrap="square" lIns="0" rIns="0" tIns="0" bIns="0" anchor="t">
+          <a:bodyPr wrap="square" lIns="0" tIns="0" rIns="0" bIns="0" anchor="t">
             <a:spAutoFit/>
           </a:bodyPr>
           <a:lstStyle/>
@@ -10973,7 +11223,7 @@
               </a:lnSpc>
             </a:pPr>
             <a:r>
-              <a:rPr b="0" sz="1425" i="0" u="none">
+              <a:rPr sz="1425" b="0" i="0" u="none">
                 <a:solidFill>
                   <a:srgbClr val="94A3B8"/>
                 </a:solidFill>
@@ -10993,7 +11243,7 @@
 </file>
 
 <file path=ppt/slides/slide9.xml><?xml version="1.0" encoding="utf-8"?>
-<p:sld xmlns:a="http://schemas.openxmlformats.org/drawingml/2006/main" xmlns:p="http://schemas.openxmlformats.org/presentationml/2006/main" xmlns:r="http://schemas.openxmlformats.org/officeDocument/2006/relationships">
+<p:sld xmlns:a="http://schemas.openxmlformats.org/drawingml/2006/main" xmlns:r="http://schemas.openxmlformats.org/officeDocument/2006/relationships" xmlns:p="http://schemas.openxmlformats.org/presentationml/2006/main">
   <p:cSld>
     <p:bg>
       <p:bgPr>
@@ -11009,7 +11259,14 @@
         <p:cNvGrpSpPr/>
         <p:nvPr/>
       </p:nvGrpSpPr>
-      <p:grpSpPr/>
+      <p:grpSpPr>
+        <a:xfrm>
+          <a:off x="0" y="0"/>
+          <a:ext cx="0" cy="0"/>
+          <a:chOff x="0" y="0"/>
+          <a:chExt cx="0" cy="0"/>
+        </a:xfrm>
+      </p:grpSpPr>
       <p:pic>
         <p:nvPicPr>
           <p:cNvPr id="2" name="Picture 1" descr="image.png"/>
@@ -11051,29 +11308,29 @@
             <a:tbl>
               <a:tblPr firstRow="1" bandRow="1">
                 <a:tableStyleId>{5C22544A-7EE6-4342-B048-85BDC9FD1C3A}</a:tableStyleId>
-                <a:lnL>
-                  <a:noFill/>
-                </a:lnL>
-                <a:lnR>
-                  <a:noFill/>
-                </a:lnR>
-                <a:lnT>
-                  <a:noFill/>
-                </a:lnT>
-                <a:lnB>
-                  <a:noFill/>
-                </a:lnB>
-                <a:lnV>
-                  <a:noFill/>
-                </a:lnV>
-                <a:lnH>
-                  <a:noFill/>
-                </a:lnH>
               </a:tblPr>
               <a:tblGrid>
-                <a:gridCol w="1868537"/>
-                <a:gridCol w="4878585"/>
-                <a:gridCol w="4282826"/>
+                <a:gridCol w="1868537">
+                  <a:extLst>
+                    <a:ext uri="{9D8B030D-6E8A-4147-A177-3AD203B41FA5}">
+                      <a16:colId xmlns:a16="http://schemas.microsoft.com/office/drawing/2014/main" val="20000"/>
+                    </a:ext>
+                  </a:extLst>
+                </a:gridCol>
+                <a:gridCol w="4878585">
+                  <a:extLst>
+                    <a:ext uri="{9D8B030D-6E8A-4147-A177-3AD203B41FA5}">
+                      <a16:colId xmlns:a16="http://schemas.microsoft.com/office/drawing/2014/main" val="20001"/>
+                    </a:ext>
+                  </a:extLst>
+                </a:gridCol>
+                <a:gridCol w="4282826">
+                  <a:extLst>
+                    <a:ext uri="{9D8B030D-6E8A-4147-A177-3AD203B41FA5}">
+                      <a16:colId xmlns:a16="http://schemas.microsoft.com/office/drawing/2014/main" val="20002"/>
+                    </a:ext>
+                  </a:extLst>
+                </a:gridCol>
               </a:tblGrid>
               <a:tr h="479107">
                 <a:tc>
@@ -11083,7 +11340,7 @@
                     <a:p>
                       <a:pPr algn="l"/>
                       <a:r>
-                        <a:rPr b="0" sz="1125" i="0" u="none">
+                        <a:rPr sz="1125" b="0" i="0" u="none">
                           <a:solidFill>
                             <a:srgbClr val="FFFFFF"/>
                           </a:solidFill>
@@ -11093,7 +11350,7 @@
                       </a:r>
                     </a:p>
                   </a:txBody>
-                  <a:tcPr anchor="ctr" marL="63500" marR="63500" marT="25400" marB="25400">
+                  <a:tcPr marL="63500" marR="63500" marT="25400" marB="25400" anchor="ctr">
                     <a:lnL>
                       <a:noFill/>
                     </a:lnL>
@@ -11118,7 +11375,7 @@
                     <a:p>
                       <a:pPr algn="l"/>
                       <a:r>
-                        <a:rPr b="0" sz="1125" i="0" u="none">
+                        <a:rPr sz="1125" b="0" i="0" u="none">
                           <a:solidFill>
                             <a:srgbClr val="FFFFFF"/>
                           </a:solidFill>
@@ -11128,7 +11385,7 @@
                       </a:r>
                     </a:p>
                   </a:txBody>
-                  <a:tcPr anchor="ctr" marL="63500" marR="63500" marT="25400" marB="25400">
+                  <a:tcPr marL="63500" marR="63500" marT="25400" marB="25400" anchor="ctr">
                     <a:lnL>
                       <a:noFill/>
                     </a:lnL>
@@ -11153,7 +11410,7 @@
                     <a:p>
                       <a:pPr algn="l"/>
                       <a:r>
-                        <a:rPr b="0" sz="1125" i="0" u="none">
+                        <a:rPr sz="1125" b="0" i="0" u="none">
                           <a:solidFill>
                             <a:srgbClr val="FFFFFF"/>
                           </a:solidFill>
@@ -11163,7 +11420,7 @@
                       </a:r>
                     </a:p>
                   </a:txBody>
-                  <a:tcPr anchor="ctr" marL="63500" marR="63500" marT="25400" marB="25400">
+                  <a:tcPr marL="63500" marR="63500" marT="25400" marB="25400" anchor="ctr">
                     <a:lnL>
                       <a:noFill/>
                     </a:lnL>
@@ -11181,6 +11438,11 @@
                     </a:solidFill>
                   </a:tcPr>
                 </a:tc>
+                <a:extLst>
+                  <a:ext uri="{0D108BD9-81ED-4DB2-BD59-A6C34878D82A}">
+                    <a16:rowId xmlns:a16="http://schemas.microsoft.com/office/drawing/2014/main" val="10000"/>
+                  </a:ext>
+                </a:extLst>
               </a:tr>
               <a:tr h="479107">
                 <a:tc>
@@ -11190,7 +11452,7 @@
                     <a:p>
                       <a:pPr algn="l"/>
                       <a:r>
-                        <a:rPr b="1" sz="1050" i="0" u="none">
+                        <a:rPr sz="1050" b="1" i="0" u="none">
                           <a:solidFill>
                             <a:srgbClr val="475569"/>
                           </a:solidFill>
@@ -11200,7 +11462,7 @@
                       </a:r>
                     </a:p>
                   </a:txBody>
-                  <a:tcPr anchor="ctr" marL="63500" marR="63500" marT="25400" marB="25400">
+                  <a:tcPr marL="63500" marR="63500" marT="25400" marB="25400" anchor="ctr">
                     <a:lnL>
                       <a:noFill/>
                     </a:lnL>
@@ -11225,7 +11487,7 @@
                     <a:p>
                       <a:pPr algn="l"/>
                       <a:r>
-                        <a:rPr b="0" sz="1050" i="0" u="none">
+                        <a:rPr sz="1050" b="0" i="0" u="none">
                           <a:solidFill>
                             <a:srgbClr val="475569"/>
                           </a:solidFill>
@@ -11235,7 +11497,7 @@
                       </a:r>
                     </a:p>
                   </a:txBody>
-                  <a:tcPr anchor="ctr" marL="63500" marR="63500" marT="25400" marB="25400">
+                  <a:tcPr marL="63500" marR="63500" marT="25400" marB="25400" anchor="ctr">
                     <a:lnL>
                       <a:noFill/>
                     </a:lnL>
@@ -11260,7 +11522,7 @@
                     <a:p>
                       <a:pPr algn="l"/>
                       <a:r>
-                        <a:rPr b="0" sz="1050" i="0" u="none">
+                        <a:rPr sz="1050" b="0" i="0" u="none">
                           <a:solidFill>
                             <a:srgbClr val="475569"/>
                           </a:solidFill>
@@ -11270,7 +11532,7 @@
                       </a:r>
                     </a:p>
                   </a:txBody>
-                  <a:tcPr anchor="ctr" marL="63500" marR="63500" marT="25400" marB="25400">
+                  <a:tcPr marL="63500" marR="63500" marT="25400" marB="25400" anchor="ctr">
                     <a:lnL>
                       <a:noFill/>
                     </a:lnL>
@@ -11288,6 +11550,11 @@
                     </a:solidFill>
                   </a:tcPr>
                 </a:tc>
+                <a:extLst>
+                  <a:ext uri="{0D108BD9-81ED-4DB2-BD59-A6C34878D82A}">
+                    <a16:rowId xmlns:a16="http://schemas.microsoft.com/office/drawing/2014/main" val="10001"/>
+                  </a:ext>
+                </a:extLst>
               </a:tr>
               <a:tr h="479107">
                 <a:tc>
@@ -11297,7 +11564,7 @@
                     <a:p>
                       <a:pPr algn="l"/>
                       <a:r>
-                        <a:rPr b="1" sz="1050" i="0" u="none">
+                        <a:rPr sz="1050" b="1" i="0" u="none">
                           <a:solidFill>
                             <a:srgbClr val="475569"/>
                           </a:solidFill>
@@ -11307,7 +11574,7 @@
                       </a:r>
                     </a:p>
                   </a:txBody>
-                  <a:tcPr anchor="ctr" marL="63500" marR="63500" marT="25400" marB="25400">
+                  <a:tcPr marL="63500" marR="63500" marT="25400" marB="25400" anchor="ctr">
                     <a:lnL>
                       <a:noFill/>
                     </a:lnL>
@@ -11332,7 +11599,7 @@
                     <a:p>
                       <a:pPr algn="l"/>
                       <a:r>
-                        <a:rPr b="0" sz="1050" i="0" u="none">
+                        <a:rPr sz="1050" b="0" i="0" u="none">
                           <a:solidFill>
                             <a:srgbClr val="475569"/>
                           </a:solidFill>
@@ -11342,7 +11609,7 @@
                       </a:r>
                     </a:p>
                   </a:txBody>
-                  <a:tcPr anchor="ctr" marL="63500" marR="63500" marT="25400" marB="25400">
+                  <a:tcPr marL="63500" marR="63500" marT="25400" marB="25400" anchor="ctr">
                     <a:lnL>
                       <a:noFill/>
                     </a:lnL>
@@ -11367,7 +11634,7 @@
                     <a:p>
                       <a:pPr algn="l"/>
                       <a:r>
-                        <a:rPr b="0" sz="1050" i="0" u="none">
+                        <a:rPr sz="1050" b="0" i="0" u="none">
                           <a:solidFill>
                             <a:srgbClr val="475569"/>
                           </a:solidFill>
@@ -11377,7 +11644,7 @@
                       </a:r>
                     </a:p>
                   </a:txBody>
-                  <a:tcPr anchor="ctr" marL="63500" marR="63500" marT="25400" marB="25400">
+                  <a:tcPr marL="63500" marR="63500" marT="25400" marB="25400" anchor="ctr">
                     <a:lnL>
                       <a:noFill/>
                     </a:lnL>
@@ -11395,6 +11662,11 @@
                     </a:solidFill>
                   </a:tcPr>
                 </a:tc>
+                <a:extLst>
+                  <a:ext uri="{0D108BD9-81ED-4DB2-BD59-A6C34878D82A}">
+                    <a16:rowId xmlns:a16="http://schemas.microsoft.com/office/drawing/2014/main" val="10002"/>
+                  </a:ext>
+                </a:extLst>
               </a:tr>
               <a:tr h="479107">
                 <a:tc>
@@ -11404,7 +11676,7 @@
                     <a:p>
                       <a:pPr algn="l"/>
                       <a:r>
-                        <a:rPr b="1" sz="1050" i="0" u="none">
+                        <a:rPr sz="1050" b="1" i="0" u="none">
                           <a:solidFill>
                             <a:srgbClr val="475569"/>
                           </a:solidFill>
@@ -11414,7 +11686,7 @@
                       </a:r>
                     </a:p>
                   </a:txBody>
-                  <a:tcPr anchor="ctr" marL="63500" marR="63500" marT="25400" marB="25400">
+                  <a:tcPr marL="63500" marR="63500" marT="25400" marB="25400" anchor="ctr">
                     <a:lnL>
                       <a:noFill/>
                     </a:lnL>
@@ -11439,7 +11711,7 @@
                     <a:p>
                       <a:pPr algn="l"/>
                       <a:r>
-                        <a:rPr b="0" sz="1050" i="0" u="none">
+                        <a:rPr sz="1050" b="0" i="0" u="none">
                           <a:solidFill>
                             <a:srgbClr val="475569"/>
                           </a:solidFill>
@@ -11449,7 +11721,7 @@
                       </a:r>
                     </a:p>
                   </a:txBody>
-                  <a:tcPr anchor="ctr" marL="63500" marR="63500" marT="25400" marB="25400">
+                  <a:tcPr marL="63500" marR="63500" marT="25400" marB="25400" anchor="ctr">
                     <a:lnL>
                       <a:noFill/>
                     </a:lnL>
@@ -11474,7 +11746,7 @@
                     <a:p>
                       <a:pPr algn="l"/>
                       <a:r>
-                        <a:rPr b="0" sz="1050" i="0" u="none">
+                        <a:rPr sz="1050" b="0" i="0" u="none">
                           <a:solidFill>
                             <a:srgbClr val="475569"/>
                           </a:solidFill>
@@ -11484,7 +11756,7 @@
                       </a:r>
                     </a:p>
                   </a:txBody>
-                  <a:tcPr anchor="ctr" marL="63500" marR="63500" marT="25400" marB="25400">
+                  <a:tcPr marL="63500" marR="63500" marT="25400" marB="25400" anchor="ctr">
                     <a:lnL>
                       <a:noFill/>
                     </a:lnL>
@@ -11502,6 +11774,11 @@
                     </a:solidFill>
                   </a:tcPr>
                 </a:tc>
+                <a:extLst>
+                  <a:ext uri="{0D108BD9-81ED-4DB2-BD59-A6C34878D82A}">
+                    <a16:rowId xmlns:a16="http://schemas.microsoft.com/office/drawing/2014/main" val="10003"/>
+                  </a:ext>
+                </a:extLst>
               </a:tr>
               <a:tr h="479109">
                 <a:tc>
@@ -11511,7 +11788,7 @@
                     <a:p>
                       <a:pPr algn="l"/>
                       <a:r>
-                        <a:rPr b="1" sz="1050" i="0" u="none">
+                        <a:rPr sz="1050" b="1" i="0" u="none">
                           <a:solidFill>
                             <a:srgbClr val="475569"/>
                           </a:solidFill>
@@ -11521,7 +11798,7 @@
                       </a:r>
                     </a:p>
                   </a:txBody>
-                  <a:tcPr anchor="ctr" marL="63500" marR="63500" marT="25400" marB="25400">
+                  <a:tcPr marL="63500" marR="63500" marT="25400" marB="25400" anchor="ctr">
                     <a:lnL>
                       <a:noFill/>
                     </a:lnL>
@@ -11546,7 +11823,7 @@
                     <a:p>
                       <a:pPr algn="l"/>
                       <a:r>
-                        <a:rPr b="0" sz="1050" i="0" u="none">
+                        <a:rPr sz="1050" b="0" i="0" u="none">
                           <a:solidFill>
                             <a:srgbClr val="475569"/>
                           </a:solidFill>
@@ -11556,7 +11833,7 @@
                       </a:r>
                     </a:p>
                   </a:txBody>
-                  <a:tcPr anchor="ctr" marL="63500" marR="63500" marT="25400" marB="25400">
+                  <a:tcPr marL="63500" marR="63500" marT="25400" marB="25400" anchor="ctr">
                     <a:lnL>
                       <a:noFill/>
                     </a:lnL>
@@ -11581,7 +11858,7 @@
                     <a:p>
                       <a:pPr algn="l"/>
                       <a:r>
-                        <a:rPr b="0" sz="1050" i="0" u="none">
+                        <a:rPr sz="1050" b="0" i="0" u="none">
                           <a:solidFill>
                             <a:srgbClr val="475569"/>
                           </a:solidFill>
@@ -11591,7 +11868,7 @@
                       </a:r>
                     </a:p>
                   </a:txBody>
-                  <a:tcPr anchor="ctr" marL="63500" marR="63500" marT="25400" marB="25400">
+                  <a:tcPr marL="63500" marR="63500" marT="25400" marB="25400" anchor="ctr">
                     <a:lnL>
                       <a:noFill/>
                     </a:lnL>
@@ -11609,6 +11886,11 @@
                     </a:solidFill>
                   </a:tcPr>
                 </a:tc>
+                <a:extLst>
+                  <a:ext uri="{0D108BD9-81ED-4DB2-BD59-A6C34878D82A}">
+                    <a16:rowId xmlns:a16="http://schemas.microsoft.com/office/drawing/2014/main" val="10004"/>
+                  </a:ext>
+                </a:extLst>
               </a:tr>
             </a:tbl>
           </a:graphicData>
@@ -11655,6 +11937,7 @@
           <a:lstStyle/>
           <a:p>
             <a:pPr algn="ctr"/>
+            <a:endParaRPr/>
           </a:p>
         </p:txBody>
       </p:sp>
@@ -11699,6 +11982,7 @@
           <a:lstStyle/>
           <a:p>
             <a:pPr algn="ctr"/>
+            <a:endParaRPr/>
           </a:p>
         </p:txBody>
       </p:sp>
@@ -11743,6 +12027,7 @@
           <a:lstStyle/>
           <a:p>
             <a:pPr algn="ctr"/>
+            <a:endParaRPr/>
           </a:p>
         </p:txBody>
       </p:sp>
@@ -11787,6 +12072,7 @@
           <a:lstStyle/>
           <a:p>
             <a:pPr algn="ctr"/>
+            <a:endParaRPr/>
           </a:p>
         </p:txBody>
       </p:sp>
@@ -11831,6 +12117,7 @@
           <a:lstStyle/>
           <a:p>
             <a:pPr algn="ctr"/>
+            <a:endParaRPr/>
           </a:p>
         </p:txBody>
       </p:sp>
@@ -11875,6 +12162,7 @@
           <a:lstStyle/>
           <a:p>
             <a:pPr algn="ctr"/>
+            <a:endParaRPr/>
           </a:p>
         </p:txBody>
       </p:sp>
@@ -11919,6 +12207,7 @@
           <a:lstStyle/>
           <a:p>
             <a:pPr algn="ctr"/>
+            <a:endParaRPr/>
           </a:p>
         </p:txBody>
       </p:sp>
@@ -11963,6 +12252,7 @@
           <a:lstStyle/>
           <a:p>
             <a:pPr algn="ctr"/>
+            <a:endParaRPr/>
           </a:p>
         </p:txBody>
       </p:sp>
@@ -12007,6 +12297,7 @@
           <a:lstStyle/>
           <a:p>
             <a:pPr algn="ctr"/>
+            <a:endParaRPr/>
           </a:p>
         </p:txBody>
       </p:sp>
@@ -12027,14 +12318,14 @@
           <a:noFill/>
         </p:spPr>
         <p:txBody>
-          <a:bodyPr wrap="square" lIns="0" rIns="0" tIns="0" bIns="0" anchor="t">
+          <a:bodyPr wrap="square" lIns="0" tIns="0" rIns="0" bIns="0" anchor="t">
             <a:spAutoFit/>
           </a:bodyPr>
           <a:lstStyle/>
           <a:p>
             <a:pPr algn="l"/>
             <a:r>
-              <a:rPr b="1" sz="2550" i="0" u="none">
+              <a:rPr sz="2550" b="1" i="0" u="none">
                 <a:solidFill>
                   <a:srgbClr val="0F172A"/>
                 </a:solidFill>
